--- a/docs/reports/project-status-2026-08-02.pptx
+++ b/docs/reports/project-status-2026-08-02.pptx
@@ -1737,28 +1737,8 @@
         </p:nvSpPr>
         <p:spPr>
           <a:xfrm>
-            <a:off x="7498080" y="-548640"/>
-            <a:ext cx="2560320" cy="2560320"/>
-          </a:xfrm>
-          <a:prstGeom prst="ellipse">
-            <a:avLst/>
-          </a:prstGeom>
-          <a:solidFill>
-            <a:srgbClr val="023C42"/>
-          </a:solidFill>
-          <a:ln/>
-        </p:spPr>
-      </p:sp>
-      <p:sp>
-        <p:nvSpPr>
-          <p:cNvPr id="6" name="Shape 4"/>
-          <p:cNvSpPr/>
-          <p:nvPr/>
-        </p:nvSpPr>
-        <p:spPr>
-          <a:xfrm>
-            <a:off x="-731520" y="3474720"/>
-            <a:ext cx="2194560" cy="2194560"/>
+            <a:off x="7680960" y="-640080"/>
+            <a:ext cx="2377440" cy="2377440"/>
           </a:xfrm>
           <a:prstGeom prst="ellipse">
             <a:avLst/>
@@ -1771,7 +1751,7 @@
       </p:sp>
       <p:pic>
         <p:nvPicPr>
-          <p:cNvPr id="7" name="Image 0" descr="preencoded.png">    </p:cNvPr>
+          <p:cNvPr id="6" name="Image 0" descr="preencoded.png">    </p:cNvPr>
           <p:cNvPicPr>
             <a:picLocks noChangeAspect="1"/>
           </p:cNvPicPr>
@@ -1795,7 +1775,7 @@
       </p:pic>
       <p:sp>
         <p:nvSpPr>
-          <p:cNvPr id="8" name="Text 5"/>
+          <p:cNvPr id="7" name="Text 4"/>
           <p:cNvSpPr/>
           <p:nvPr/>
         </p:nvSpPr>
@@ -1834,53 +1814,53 @@
       </p:sp>
       <p:sp>
         <p:nvSpPr>
+          <p:cNvPr id="8" name="Text 5"/>
+          <p:cNvSpPr/>
+          <p:nvPr/>
+        </p:nvSpPr>
+        <p:spPr>
+          <a:xfrm>
+            <a:off x="502920" y="1417320"/>
+            <a:ext cx="8046720" cy="411480"/>
+          </a:xfrm>
+          <a:prstGeom prst="rect">
+            <a:avLst/>
+          </a:prstGeom>
+          <a:noFill/>
+          <a:ln/>
+        </p:spPr>
+        <p:txBody>
+          <a:bodyPr wrap="square" lIns="0" tIns="0" rIns="0" bIns="0" rtlCol="0" anchor="ctr"/>
+          <a:lstStyle/>
+          <a:p>
+            <a:pPr indent="0" marL="0">
+              <a:buNone/>
+            </a:pPr>
+            <a:r>
+              <a:rPr lang="en-US" sz="2000" dirty="0">
+                <a:solidFill>
+                  <a:srgbClr val="00A896"/>
+                </a:solidFill>
+                <a:latin typeface="Calibri" pitchFamily="34" charset="0"/>
+                <a:ea typeface="Calibri" pitchFamily="34" charset="-122"/>
+                <a:cs typeface="Calibri" pitchFamily="34" charset="-120"/>
+              </a:rPr>
+              <a:t>AI 零代码应用生成平台</a:t>
+            </a:r>
+            <a:endParaRPr lang="en-US" sz="2000" dirty="0"/>
+          </a:p>
+        </p:txBody>
+      </p:sp>
+      <p:sp>
+        <p:nvSpPr>
           <p:cNvPr id="9" name="Text 6"/>
           <p:cNvSpPr/>
           <p:nvPr/>
         </p:nvSpPr>
         <p:spPr>
           <a:xfrm>
-            <a:off x="502920" y="1371600"/>
-            <a:ext cx="8046720" cy="502920"/>
-          </a:xfrm>
-          <a:prstGeom prst="rect">
-            <a:avLst/>
-          </a:prstGeom>
-          <a:noFill/>
-          <a:ln/>
-        </p:spPr>
-        <p:txBody>
-          <a:bodyPr wrap="square" lIns="0" tIns="0" rIns="0" bIns="0" rtlCol="0" anchor="ctr"/>
-          <a:lstStyle/>
-          <a:p>
-            <a:pPr indent="0" marL="0">
-              <a:buNone/>
-            </a:pPr>
-            <a:r>
-              <a:rPr lang="en-US" sz="2000" dirty="0">
-                <a:solidFill>
-                  <a:srgbClr val="00A896"/>
-                </a:solidFill>
-                <a:latin typeface="Calibri" pitchFamily="34" charset="0"/>
-                <a:ea typeface="Calibri" pitchFamily="34" charset="-122"/>
-                <a:cs typeface="Calibri" pitchFamily="34" charset="-120"/>
-              </a:rPr>
-              <a:t>AI 零代码应用生成平台</a:t>
-            </a:r>
-            <a:endParaRPr lang="en-US" sz="2000" dirty="0"/>
-          </a:p>
-        </p:txBody>
-      </p:sp>
-      <p:sp>
-        <p:nvSpPr>
-          <p:cNvPr id="10" name="Text 7"/>
-          <p:cNvSpPr/>
-          <p:nvPr/>
-        </p:nvSpPr>
-        <p:spPr>
-          <a:xfrm>
             <a:off x="502920" y="1965960"/>
-            <a:ext cx="8046720" cy="777240"/>
+            <a:ext cx="8046720" cy="731520"/>
           </a:xfrm>
           <a:prstGeom prst="rect">
             <a:avLst/>
@@ -1912,13 +1892,13 @@
       </p:sp>
       <p:sp>
         <p:nvSpPr>
-          <p:cNvPr id="11" name="Text 8"/>
-          <p:cNvSpPr/>
-          <p:nvPr/>
-        </p:nvSpPr>
-        <p:spPr>
-          <a:xfrm>
-            <a:off x="502920" y="2880360"/>
+          <p:cNvPr id="10" name="Text 7"/>
+          <p:cNvSpPr/>
+          <p:nvPr/>
+        </p:nvSpPr>
+        <p:spPr>
+          <a:xfrm>
+            <a:off x="502920" y="2834640"/>
             <a:ext cx="7315200" cy="365760"/>
           </a:xfrm>
           <a:prstGeom prst="rect">
@@ -1937,7 +1917,7 @@
             <a:r>
               <a:rPr lang="en-US" sz="1600" dirty="0">
                 <a:solidFill>
-                  <a:srgbClr val="A8D5CE"/>
+                  <a:srgbClr val="B8E0D8"/>
                 </a:solidFill>
                 <a:latin typeface="Calibri" pitchFamily="34" charset="0"/>
                 <a:ea typeface="Calibri" pitchFamily="34" charset="-122"/>
@@ -1951,18 +1931,18 @@
       </p:sp>
       <p:sp>
         <p:nvSpPr>
-          <p:cNvPr id="12" name="Shape 9"/>
-          <p:cNvSpPr/>
-          <p:nvPr/>
-        </p:nvSpPr>
-        <p:spPr>
-          <a:xfrm>
-            <a:off x="502920" y="3977640"/>
-            <a:ext cx="1371600" cy="347472"/>
+          <p:cNvPr id="11" name="Shape 8"/>
+          <p:cNvSpPr/>
+          <p:nvPr/>
+        </p:nvSpPr>
+        <p:spPr>
+          <a:xfrm>
+            <a:off x="502920" y="3931920"/>
+            <a:ext cx="1371600" cy="384048"/>
           </a:xfrm>
           <a:prstGeom prst="roundRect">
             <a:avLst>
-              <a:gd name="adj" fmla="val 21053"/>
+              <a:gd name="adj" fmla="val 19048"/>
             </a:avLst>
           </a:prstGeom>
           <a:solidFill>
@@ -1973,14 +1953,14 @@
       </p:sp>
       <p:sp>
         <p:nvSpPr>
-          <p:cNvPr id="13" name="Text 10"/>
-          <p:cNvSpPr/>
-          <p:nvPr/>
-        </p:nvSpPr>
-        <p:spPr>
-          <a:xfrm>
-            <a:off x="502920" y="3977640"/>
-            <a:ext cx="1371600" cy="347472"/>
+          <p:cNvPr id="12" name="Text 9"/>
+          <p:cNvSpPr/>
+          <p:nvPr/>
+        </p:nvSpPr>
+        <p:spPr>
+          <a:xfrm>
+            <a:off x="502920" y="3931920"/>
+            <a:ext cx="1371600" cy="384048"/>
           </a:xfrm>
           <a:prstGeom prst="rect">
             <a:avLst/>
@@ -2012,18 +1992,18 @@
       </p:sp>
       <p:sp>
         <p:nvSpPr>
-          <p:cNvPr id="14" name="Shape 11"/>
-          <p:cNvSpPr/>
-          <p:nvPr/>
-        </p:nvSpPr>
-        <p:spPr>
-          <a:xfrm>
-            <a:off x="2148840" y="3977640"/>
-            <a:ext cx="1371600" cy="347472"/>
+          <p:cNvPr id="13" name="Shape 10"/>
+          <p:cNvSpPr/>
+          <p:nvPr/>
+        </p:nvSpPr>
+        <p:spPr>
+          <a:xfrm>
+            <a:off x="2103120" y="3931920"/>
+            <a:ext cx="1097280" cy="384048"/>
           </a:xfrm>
           <a:prstGeom prst="roundRect">
             <a:avLst>
-              <a:gd name="adj" fmla="val 21053"/>
+              <a:gd name="adj" fmla="val 19048"/>
             </a:avLst>
           </a:prstGeom>
           <a:solidFill>
@@ -2034,14 +2014,14 @@
       </p:sp>
       <p:sp>
         <p:nvSpPr>
-          <p:cNvPr id="15" name="Text 12"/>
-          <p:cNvSpPr/>
-          <p:nvPr/>
-        </p:nvSpPr>
-        <p:spPr>
-          <a:xfrm>
-            <a:off x="2148840" y="3977640"/>
-            <a:ext cx="1371600" cy="347472"/>
+          <p:cNvPr id="14" name="Text 11"/>
+          <p:cNvSpPr/>
+          <p:nvPr/>
+        </p:nvSpPr>
+        <p:spPr>
+          <a:xfrm>
+            <a:off x="2103120" y="3931920"/>
+            <a:ext cx="1097280" cy="384048"/>
           </a:xfrm>
           <a:prstGeom prst="rect">
             <a:avLst/>
@@ -2073,18 +2053,18 @@
       </p:sp>
       <p:sp>
         <p:nvSpPr>
-          <p:cNvPr id="16" name="Shape 13"/>
-          <p:cNvSpPr/>
-          <p:nvPr/>
-        </p:nvSpPr>
-        <p:spPr>
-          <a:xfrm>
-            <a:off x="3246120" y="3977640"/>
-            <a:ext cx="3291840" cy="347472"/>
+          <p:cNvPr id="15" name="Shape 12"/>
+          <p:cNvSpPr/>
+          <p:nvPr/>
+        </p:nvSpPr>
+        <p:spPr>
+          <a:xfrm>
+            <a:off x="3429000" y="3931920"/>
+            <a:ext cx="3474720" cy="384048"/>
           </a:xfrm>
           <a:prstGeom prst="roundRect">
             <a:avLst>
-              <a:gd name="adj" fmla="val 21053"/>
+              <a:gd name="adj" fmla="val 19048"/>
             </a:avLst>
           </a:prstGeom>
           <a:solidFill>
@@ -2095,14 +2075,14 @@
       </p:sp>
       <p:sp>
         <p:nvSpPr>
-          <p:cNvPr id="17" name="Text 14"/>
-          <p:cNvSpPr/>
-          <p:nvPr/>
-        </p:nvSpPr>
-        <p:spPr>
-          <a:xfrm>
-            <a:off x="3246120" y="3977640"/>
-            <a:ext cx="3291840" cy="347472"/>
+          <p:cNvPr id="16" name="Text 13"/>
+          <p:cNvSpPr/>
+          <p:nvPr/>
+        </p:nvSpPr>
+        <p:spPr>
+          <a:xfrm>
+            <a:off x="3429000" y="3931920"/>
+            <a:ext cx="3474720" cy="384048"/>
           </a:xfrm>
           <a:prstGeom prst="rect">
             <a:avLst/>
@@ -2206,7 +2186,7 @@
         <p:spPr>
           <a:xfrm>
             <a:off x="502920" y="411480"/>
-            <a:ext cx="7315200" cy="502920"/>
+            <a:ext cx="7315200" cy="457200"/>
           </a:xfrm>
           <a:prstGeom prst="rect">
             <a:avLst/>
@@ -2263,7 +2243,7 @@
             <a:r>
               <a:rPr lang="en-US" sz="1600" i="1" dirty="0">
                 <a:solidFill>
-                  <a:srgbClr val="A8D5CE"/>
+                  <a:srgbClr val="B8E0D8"/>
                 </a:solidFill>
                 <a:latin typeface="Calibri" pitchFamily="34" charset="0"/>
                 <a:ea typeface="Calibri" pitchFamily="34" charset="-122"/>
@@ -2284,11 +2264,11 @@
         <p:spPr>
           <a:xfrm>
             <a:off x="502920" y="1508760"/>
-            <a:ext cx="4023360" cy="1143000"/>
+            <a:ext cx="4069080" cy="1188720"/>
           </a:xfrm>
           <a:prstGeom prst="roundRect">
             <a:avLst>
-              <a:gd name="adj" fmla="val 8000"/>
+              <a:gd name="adj" fmla="val 7692"/>
             </a:avLst>
           </a:prstGeom>
           <a:solidFill>
@@ -2305,7 +2285,7 @@
         </p:nvSpPr>
         <p:spPr>
           <a:xfrm>
-            <a:off x="731520" y="1828800"/>
+            <a:off x="731520" y="1856232"/>
             <a:ext cx="502920" cy="502920"/>
           </a:xfrm>
           <a:prstGeom prst="ellipse">
@@ -2333,7 +2313,7 @@
         </p:blipFill>
         <p:spPr>
           <a:xfrm>
-            <a:off x="822960" y="1920240"/>
+            <a:off x="822960" y="1947672"/>
             <a:ext cx="320040" cy="320040"/>
           </a:xfrm>
           <a:prstGeom prst="rect">
@@ -2350,7 +2330,7 @@
         <p:spPr>
           <a:xfrm>
             <a:off x="1417320" y="1737360"/>
-            <a:ext cx="2834640" cy="320040"/>
+            <a:ext cx="2926080" cy="320040"/>
           </a:xfrm>
           <a:prstGeom prst="rect">
             <a:avLst/>
@@ -2389,7 +2369,7 @@
         <p:spPr>
           <a:xfrm>
             <a:off x="1417320" y="2103120"/>
-            <a:ext cx="2834640" cy="365760"/>
+            <a:ext cx="2926080" cy="411480"/>
           </a:xfrm>
           <a:prstGeom prst="rect">
             <a:avLst/>
@@ -2428,11 +2408,11 @@
         <p:spPr>
           <a:xfrm>
             <a:off x="4800600" y="1508760"/>
-            <a:ext cx="4023360" cy="1143000"/>
+            <a:ext cx="4069080" cy="1188720"/>
           </a:xfrm>
           <a:prstGeom prst="roundRect">
             <a:avLst>
-              <a:gd name="adj" fmla="val 8000"/>
+              <a:gd name="adj" fmla="val 7692"/>
             </a:avLst>
           </a:prstGeom>
           <a:solidFill>
@@ -2449,7 +2429,7 @@
         </p:nvSpPr>
         <p:spPr>
           <a:xfrm>
-            <a:off x="5029200" y="1828800"/>
+            <a:off x="5029200" y="1856232"/>
             <a:ext cx="502920" cy="502920"/>
           </a:xfrm>
           <a:prstGeom prst="ellipse">
@@ -2477,7 +2457,7 @@
         </p:blipFill>
         <p:spPr>
           <a:xfrm>
-            <a:off x="5120640" y="1920240"/>
+            <a:off x="5120640" y="1947672"/>
             <a:ext cx="320040" cy="320040"/>
           </a:xfrm>
           <a:prstGeom prst="rect">
@@ -2494,7 +2474,7 @@
         <p:spPr>
           <a:xfrm>
             <a:off x="5715000" y="1737360"/>
-            <a:ext cx="2834640" cy="320040"/>
+            <a:ext cx="2926080" cy="320040"/>
           </a:xfrm>
           <a:prstGeom prst="rect">
             <a:avLst/>
@@ -2533,7 +2513,7 @@
         <p:spPr>
           <a:xfrm>
             <a:off x="5715000" y="2103120"/>
-            <a:ext cx="2834640" cy="365760"/>
+            <a:ext cx="2926080" cy="411480"/>
           </a:xfrm>
           <a:prstGeom prst="rect">
             <a:avLst/>
@@ -2557,7 +2537,7 @@
                 <a:ea typeface="Calibri" pitchFamily="34" charset="-122"/>
                 <a:cs typeface="Calibri" pitchFamily="34" charset="-120"/>
               </a:rPr>
-              <a:t>#5 仍阻塞 Vue 生成主路径体验</a:t>
+              <a:t>Issue #5 仍阻塞 Vue 生成主路径体验</a:t>
             </a:r>
             <a:endParaRPr lang="en-US" sz="1300" dirty="0"/>
           </a:p>
@@ -2571,12 +2551,12 @@
         </p:nvSpPr>
         <p:spPr>
           <a:xfrm>
-            <a:off x="502920" y="2834640"/>
-            <a:ext cx="4023360" cy="1143000"/>
+            <a:off x="502920" y="2880360"/>
+            <a:ext cx="4069080" cy="1188720"/>
           </a:xfrm>
           <a:prstGeom prst="roundRect">
             <a:avLst>
-              <a:gd name="adj" fmla="val 8000"/>
+              <a:gd name="adj" fmla="val 7692"/>
             </a:avLst>
           </a:prstGeom>
           <a:solidFill>
@@ -2593,7 +2573,7 @@
         </p:nvSpPr>
         <p:spPr>
           <a:xfrm>
-            <a:off x="731520" y="3154680"/>
+            <a:off x="731520" y="3227832"/>
             <a:ext cx="502920" cy="502920"/>
           </a:xfrm>
           <a:prstGeom prst="ellipse">
@@ -2621,7 +2601,7 @@
         </p:blipFill>
         <p:spPr>
           <a:xfrm>
-            <a:off x="822960" y="3246120"/>
+            <a:off x="822960" y="3319272"/>
             <a:ext cx="320040" cy="320040"/>
           </a:xfrm>
           <a:prstGeom prst="rect">
@@ -2637,8 +2617,8 @@
         </p:nvSpPr>
         <p:spPr>
           <a:xfrm>
-            <a:off x="1417320" y="3063240"/>
-            <a:ext cx="2834640" cy="320040"/>
+            <a:off x="1417320" y="3108960"/>
+            <a:ext cx="2926080" cy="320040"/>
           </a:xfrm>
           <a:prstGeom prst="rect">
             <a:avLst/>
@@ -2676,8 +2656,8 @@
         </p:nvSpPr>
         <p:spPr>
           <a:xfrm>
-            <a:off x="1417320" y="3429000"/>
-            <a:ext cx="2834640" cy="365760"/>
+            <a:off x="1417320" y="3474720"/>
+            <a:ext cx="2926080" cy="411480"/>
           </a:xfrm>
           <a:prstGeom prst="rect">
             <a:avLst/>
@@ -2715,12 +2695,12 @@
         </p:nvSpPr>
         <p:spPr>
           <a:xfrm>
-            <a:off x="4800600" y="2834640"/>
-            <a:ext cx="4023360" cy="1143000"/>
+            <a:off x="4800600" y="2880360"/>
+            <a:ext cx="4069080" cy="1188720"/>
           </a:xfrm>
           <a:prstGeom prst="roundRect">
             <a:avLst>
-              <a:gd name="adj" fmla="val 8000"/>
+              <a:gd name="adj" fmla="val 7692"/>
             </a:avLst>
           </a:prstGeom>
           <a:solidFill>
@@ -2737,7 +2717,7 @@
         </p:nvSpPr>
         <p:spPr>
           <a:xfrm>
-            <a:off x="5029200" y="3154680"/>
+            <a:off x="5029200" y="3227832"/>
             <a:ext cx="502920" cy="502920"/>
           </a:xfrm>
           <a:prstGeom prst="ellipse">
@@ -2765,7 +2745,7 @@
         </p:blipFill>
         <p:spPr>
           <a:xfrm>
-            <a:off x="5120640" y="3246120"/>
+            <a:off x="5120640" y="3319272"/>
             <a:ext cx="320040" cy="320040"/>
           </a:xfrm>
           <a:prstGeom prst="rect">
@@ -2781,8 +2761,8 @@
         </p:nvSpPr>
         <p:spPr>
           <a:xfrm>
-            <a:off x="5715000" y="3063240"/>
-            <a:ext cx="2834640" cy="320040"/>
+            <a:off x="5715000" y="3108960"/>
+            <a:ext cx="2926080" cy="320040"/>
           </a:xfrm>
           <a:prstGeom prst="rect">
             <a:avLst/>
@@ -2820,8 +2800,8 @@
         </p:nvSpPr>
         <p:spPr>
           <a:xfrm>
-            <a:off x="5715000" y="3429000"/>
-            <a:ext cx="2834640" cy="365760"/>
+            <a:off x="5715000" y="3474720"/>
+            <a:ext cx="2926080" cy="411480"/>
           </a:xfrm>
           <a:prstGeom prst="rect">
             <a:avLst/>
@@ -2929,8 +2909,8 @@
         </p:nvSpPr>
         <p:spPr>
           <a:xfrm>
-            <a:off x="457200" y="256032"/>
-            <a:ext cx="8229600" cy="502920"/>
+            <a:off x="457200" y="292608"/>
+            <a:ext cx="8229600" cy="457200"/>
           </a:xfrm>
           <a:prstGeom prst="rect">
             <a:avLst/>
@@ -2946,7 +2926,7 @@
               <a:buNone/>
             </a:pPr>
             <a:r>
-              <a:rPr lang="en-US" sz="3600" b="1" dirty="0">
+              <a:rPr lang="en-US" sz="3400" b="1" dirty="0">
                 <a:solidFill>
                   <a:srgbClr val="012A30"/>
                 </a:solidFill>
@@ -2956,7 +2936,7 @@
               </a:rPr>
               <a:t>项目概览</a:t>
             </a:r>
-            <a:endParaRPr lang="en-US" sz="3600" dirty="0"/>
+            <a:endParaRPr lang="en-US" sz="3400" dirty="0"/>
           </a:p>
         </p:txBody>
       </p:sp>
@@ -2968,8 +2948,8 @@
         </p:nvSpPr>
         <p:spPr>
           <a:xfrm>
-            <a:off x="457200" y="822960"/>
-            <a:ext cx="8229600" cy="320040"/>
+            <a:off x="457200" y="804672"/>
+            <a:ext cx="8229600" cy="274320"/>
           </a:xfrm>
           <a:prstGeom prst="rect">
             <a:avLst/>
@@ -2987,7 +2967,7 @@
             <a:r>
               <a:rPr lang="en-US" sz="1400" i="1" dirty="0">
                 <a:solidFill>
-                  <a:srgbClr val="5A6F72"/>
+                  <a:srgbClr val="3D5558"/>
                 </a:solidFill>
                 <a:latin typeface="Calibri" pitchFamily="34" charset="0"/>
                 <a:ea typeface="Calibri" pitchFamily="34" charset="-122"/>
@@ -3007,8 +2987,8 @@
         </p:nvSpPr>
         <p:spPr>
           <a:xfrm>
-            <a:off x="457200" y="1325880"/>
-            <a:ext cx="3977640" cy="1371600"/>
+            <a:off x="457200" y="1280160"/>
+            <a:ext cx="4023360" cy="1371600"/>
           </a:xfrm>
           <a:prstGeom prst="roundRect">
             <a:avLst>
@@ -3036,7 +3016,7 @@
         </p:nvSpPr>
         <p:spPr>
           <a:xfrm>
-            <a:off x="658368" y="1581912"/>
+            <a:off x="658368" y="1536192"/>
             <a:ext cx="438912" cy="438912"/>
           </a:xfrm>
           <a:prstGeom prst="ellipse">
@@ -3064,7 +3044,7 @@
         </p:blipFill>
         <p:spPr>
           <a:xfrm>
-            <a:off x="731520" y="1655064"/>
+            <a:off x="731520" y="1609344"/>
             <a:ext cx="292608" cy="292608"/>
           </a:xfrm>
           <a:prstGeom prst="rect">
@@ -3080,7 +3060,7 @@
         </p:nvSpPr>
         <p:spPr>
           <a:xfrm>
-            <a:off x="1234440" y="1600200"/>
+            <a:off x="1234440" y="1536192"/>
             <a:ext cx="2926080" cy="365760"/>
           </a:xfrm>
           <a:prstGeom prst="rect">
@@ -3119,8 +3099,8 @@
         </p:nvSpPr>
         <p:spPr>
           <a:xfrm>
-            <a:off x="685800" y="2103120"/>
-            <a:ext cx="3566160" cy="457200"/>
+            <a:off x="685800" y="2057400"/>
+            <a:ext cx="3611880" cy="457200"/>
           </a:xfrm>
           <a:prstGeom prst="rect">
             <a:avLst/>
@@ -3158,8 +3138,8 @@
         </p:nvSpPr>
         <p:spPr>
           <a:xfrm>
-            <a:off x="4709160" y="1325880"/>
-            <a:ext cx="3977640" cy="1371600"/>
+            <a:off x="4709160" y="1280160"/>
+            <a:ext cx="4023360" cy="1371600"/>
           </a:xfrm>
           <a:prstGeom prst="roundRect">
             <a:avLst>
@@ -3187,7 +3167,7 @@
         </p:nvSpPr>
         <p:spPr>
           <a:xfrm>
-            <a:off x="4910328" y="1581912"/>
+            <a:off x="4910328" y="1536192"/>
             <a:ext cx="438912" cy="438912"/>
           </a:xfrm>
           <a:prstGeom prst="ellipse">
@@ -3215,7 +3195,7 @@
         </p:blipFill>
         <p:spPr>
           <a:xfrm>
-            <a:off x="4983480" y="1655064"/>
+            <a:off x="4983480" y="1609344"/>
             <a:ext cx="292608" cy="292608"/>
           </a:xfrm>
           <a:prstGeom prst="rect">
@@ -3231,7 +3211,7 @@
         </p:nvSpPr>
         <p:spPr>
           <a:xfrm>
-            <a:off x="5486400" y="1600200"/>
+            <a:off x="5486400" y="1536192"/>
             <a:ext cx="2926080" cy="365760"/>
           </a:xfrm>
           <a:prstGeom prst="rect">
@@ -3270,8 +3250,8 @@
         </p:nvSpPr>
         <p:spPr>
           <a:xfrm>
-            <a:off x="4937760" y="2103120"/>
-            <a:ext cx="3566160" cy="457200"/>
+            <a:off x="4937760" y="2057400"/>
+            <a:ext cx="3611880" cy="457200"/>
           </a:xfrm>
           <a:prstGeom prst="rect">
             <a:avLst/>
@@ -3309,8 +3289,8 @@
         </p:nvSpPr>
         <p:spPr>
           <a:xfrm>
-            <a:off x="457200" y="2926080"/>
-            <a:ext cx="3977640" cy="1371600"/>
+            <a:off x="457200" y="2834640"/>
+            <a:ext cx="4023360" cy="1371600"/>
           </a:xfrm>
           <a:prstGeom prst="roundRect">
             <a:avLst>
@@ -3338,7 +3318,7 @@
         </p:nvSpPr>
         <p:spPr>
           <a:xfrm>
-            <a:off x="658368" y="3182112"/>
+            <a:off x="658368" y="3090672"/>
             <a:ext cx="438912" cy="438912"/>
           </a:xfrm>
           <a:prstGeom prst="ellipse">
@@ -3366,7 +3346,7 @@
         </p:blipFill>
         <p:spPr>
           <a:xfrm>
-            <a:off x="731520" y="3255264"/>
+            <a:off x="731520" y="3163824"/>
             <a:ext cx="292608" cy="292608"/>
           </a:xfrm>
           <a:prstGeom prst="rect">
@@ -3382,7 +3362,7 @@
         </p:nvSpPr>
         <p:spPr>
           <a:xfrm>
-            <a:off x="1234440" y="3200400"/>
+            <a:off x="1234440" y="3090672"/>
             <a:ext cx="2926080" cy="365760"/>
           </a:xfrm>
           <a:prstGeom prst="rect">
@@ -3421,8 +3401,8 @@
         </p:nvSpPr>
         <p:spPr>
           <a:xfrm>
-            <a:off x="685800" y="3703320"/>
-            <a:ext cx="3566160" cy="457200"/>
+            <a:off x="685800" y="3611880"/>
+            <a:ext cx="3611880" cy="457200"/>
           </a:xfrm>
           <a:prstGeom prst="rect">
             <a:avLst/>
@@ -3460,8 +3440,8 @@
         </p:nvSpPr>
         <p:spPr>
           <a:xfrm>
-            <a:off x="4709160" y="2926080"/>
-            <a:ext cx="3977640" cy="1371600"/>
+            <a:off x="4709160" y="2834640"/>
+            <a:ext cx="4023360" cy="1371600"/>
           </a:xfrm>
           <a:prstGeom prst="roundRect">
             <a:avLst>
@@ -3489,7 +3469,7 @@
         </p:nvSpPr>
         <p:spPr>
           <a:xfrm>
-            <a:off x="4910328" y="3182112"/>
+            <a:off x="4910328" y="3090672"/>
             <a:ext cx="438912" cy="438912"/>
           </a:xfrm>
           <a:prstGeom prst="ellipse">
@@ -3517,7 +3497,7 @@
         </p:blipFill>
         <p:spPr>
           <a:xfrm>
-            <a:off x="4983480" y="3255264"/>
+            <a:off x="4983480" y="3163824"/>
             <a:ext cx="292608" cy="292608"/>
           </a:xfrm>
           <a:prstGeom prst="rect">
@@ -3533,7 +3513,7 @@
         </p:nvSpPr>
         <p:spPr>
           <a:xfrm>
-            <a:off x="5486400" y="3200400"/>
+            <a:off x="5486400" y="3090672"/>
             <a:ext cx="2926080" cy="365760"/>
           </a:xfrm>
           <a:prstGeom prst="rect">
@@ -3572,8 +3552,8 @@
         </p:nvSpPr>
         <p:spPr>
           <a:xfrm>
-            <a:off x="4937760" y="3703320"/>
-            <a:ext cx="3566160" cy="457200"/>
+            <a:off x="4937760" y="3611880"/>
+            <a:ext cx="3611880" cy="457200"/>
           </a:xfrm>
           <a:prstGeom prst="rect">
             <a:avLst/>
@@ -3611,8 +3591,8 @@
         </p:nvSpPr>
         <p:spPr>
           <a:xfrm>
-            <a:off x="0" y="4800600"/>
-            <a:ext cx="9144000" cy="342900"/>
+            <a:off x="0" y="4828032"/>
+            <a:ext cx="9144000" cy="315468"/>
           </a:xfrm>
           <a:prstGeom prst="rect">
             <a:avLst/>
@@ -3636,7 +3616,7 @@
         </p:nvSpPr>
         <p:spPr>
           <a:xfrm>
-            <a:off x="457200" y="4828032"/>
+            <a:off x="457200" y="4846320"/>
             <a:ext cx="5943600" cy="274320"/>
           </a:xfrm>
           <a:prstGeom prst="rect">
@@ -3655,7 +3635,7 @@
             <a:r>
               <a:rPr lang="en-US" sz="1100" dirty="0">
                 <a:solidFill>
-                  <a:srgbClr val="5A6F72"/>
+                  <a:srgbClr val="023C42"/>
                 </a:solidFill>
                 <a:latin typeface="Calibri" pitchFamily="34" charset="0"/>
                 <a:ea typeface="Calibri" pitchFamily="34" charset="-122"/>
@@ -3675,7 +3655,7 @@
         </p:nvSpPr>
         <p:spPr>
           <a:xfrm>
-            <a:off x="7498080" y="4828032"/>
+            <a:off x="7498080" y="4846320"/>
             <a:ext cx="1188720" cy="274320"/>
           </a:xfrm>
           <a:prstGeom prst="rect">
@@ -3694,7 +3674,7 @@
             <a:r>
               <a:rPr lang="en-US" sz="1100" dirty="0">
                 <a:solidFill>
-                  <a:srgbClr val="5A6F72"/>
+                  <a:srgbClr val="023C42"/>
                 </a:solidFill>
                 <a:latin typeface="Calibri" pitchFamily="34" charset="0"/>
                 <a:ea typeface="Calibri" pitchFamily="34" charset="-122"/>
@@ -3784,8 +3764,8 @@
         </p:nvSpPr>
         <p:spPr>
           <a:xfrm>
-            <a:off x="457200" y="256032"/>
-            <a:ext cx="8229600" cy="502920"/>
+            <a:off x="457200" y="292608"/>
+            <a:ext cx="8229600" cy="457200"/>
           </a:xfrm>
           <a:prstGeom prst="rect">
             <a:avLst/>
@@ -3801,7 +3781,7 @@
               <a:buNone/>
             </a:pPr>
             <a:r>
-              <a:rPr lang="en-US" sz="3600" b="1" dirty="0">
+              <a:rPr lang="en-US" sz="3400" b="1" dirty="0">
                 <a:solidFill>
                   <a:srgbClr val="012A30"/>
                 </a:solidFill>
@@ -3811,7 +3791,7 @@
               </a:rPr>
               <a:t>核心能力</a:t>
             </a:r>
-            <a:endParaRPr lang="en-US" sz="3600" dirty="0"/>
+            <a:endParaRPr lang="en-US" sz="3400" dirty="0"/>
           </a:p>
         </p:txBody>
       </p:sp>
@@ -3823,7 +3803,7 @@
         </p:nvSpPr>
         <p:spPr>
           <a:xfrm>
-            <a:off x="457200" y="822960"/>
+            <a:off x="457200" y="804672"/>
             <a:ext cx="8229600" cy="274320"/>
           </a:xfrm>
           <a:prstGeom prst="rect">
@@ -3842,7 +3822,7 @@
             <a:r>
               <a:rPr lang="en-US" sz="1400" i="1" dirty="0">
                 <a:solidFill>
-                  <a:srgbClr val="5A6F72"/>
+                  <a:srgbClr val="3D5558"/>
                 </a:solidFill>
                 <a:latin typeface="Calibri" pitchFamily="34" charset="0"/>
                 <a:ea typeface="Calibri" pitchFamily="34" charset="-122"/>
@@ -3863,12 +3843,10 @@
         <p:spPr>
           <a:xfrm>
             <a:off x="457200" y="1280160"/>
-            <a:ext cx="2011680" cy="3108960"/>
-          </a:xfrm>
-          <a:prstGeom prst="roundRect">
-            <a:avLst>
-              <a:gd name="adj" fmla="val 4545"/>
-            </a:avLst>
+            <a:ext cx="2011680" cy="3154680"/>
+          </a:xfrm>
+          <a:prstGeom prst="rect">
+            <a:avLst/>
           </a:prstGeom>
           <a:solidFill>
             <a:srgbClr val="FFFFFF"/>
@@ -3994,8 +3972,8 @@
         </p:nvSpPr>
         <p:spPr>
           <a:xfrm>
-            <a:off x="566928" y="2971800"/>
-            <a:ext cx="1792224" cy="502920"/>
+            <a:off x="566928" y="2926080"/>
+            <a:ext cx="1792224" cy="457200"/>
           </a:xfrm>
           <a:prstGeom prst="rect">
             <a:avLst/>
@@ -4011,7 +3989,7 @@
               <a:buNone/>
             </a:pPr>
             <a:r>
-              <a:rPr lang="en-US" sz="1600" b="1" dirty="0">
+              <a:rPr lang="en-US" sz="1500" b="1" dirty="0">
                 <a:solidFill>
                   <a:srgbClr val="012A30"/>
                 </a:solidFill>
@@ -4021,7 +3999,7 @@
               </a:rPr>
               <a:t>智能代码生成</a:t>
             </a:r>
-            <a:endParaRPr lang="en-US" sz="1600" dirty="0"/>
+            <a:endParaRPr lang="en-US" sz="1500" dirty="0"/>
           </a:p>
         </p:txBody>
       </p:sp>
@@ -4033,8 +4011,8 @@
         </p:nvSpPr>
         <p:spPr>
           <a:xfrm>
-            <a:off x="594360" y="3520440"/>
-            <a:ext cx="1737360" cy="685800"/>
+            <a:off x="621792" y="3429000"/>
+            <a:ext cx="1682496" cy="822960"/>
           </a:xfrm>
           <a:prstGeom prst="rect">
             <a:avLst/>
@@ -4072,13 +4050,11 @@
         </p:nvSpPr>
         <p:spPr>
           <a:xfrm>
-            <a:off x="2606040" y="1280160"/>
-            <a:ext cx="2011680" cy="3108960"/>
-          </a:xfrm>
-          <a:prstGeom prst="roundRect">
-            <a:avLst>
-              <a:gd name="adj" fmla="val 4545"/>
-            </a:avLst>
+            <a:off x="2651760" y="1280160"/>
+            <a:ext cx="2011680" cy="3154680"/>
+          </a:xfrm>
+          <a:prstGeom prst="rect">
+            <a:avLst/>
           </a:prstGeom>
           <a:solidFill>
             <a:srgbClr val="FFFFFF"/>
@@ -4101,14 +4077,14 @@
         </p:nvSpPr>
         <p:spPr>
           <a:xfrm>
-            <a:off x="2606040" y="1280160"/>
+            <a:off x="2651760" y="1280160"/>
             <a:ext cx="2011680" cy="109728"/>
           </a:xfrm>
           <a:prstGeom prst="rect">
             <a:avLst/>
           </a:prstGeom>
           <a:solidFill>
-            <a:srgbClr val="02C39A"/>
+            <a:srgbClr val="028090"/>
           </a:solidFill>
           <a:ln/>
         </p:spPr>
@@ -4121,7 +4097,7 @@
         </p:nvSpPr>
         <p:spPr>
           <a:xfrm>
-            <a:off x="2743200" y="1554480"/>
+            <a:off x="2788920" y="1554480"/>
             <a:ext cx="1737360" cy="320040"/>
           </a:xfrm>
           <a:prstGeom prst="rect">
@@ -4160,7 +4136,7 @@
         </p:nvSpPr>
         <p:spPr>
           <a:xfrm>
-            <a:off x="3246120" y="2011680"/>
+            <a:off x="3291840" y="2011680"/>
             <a:ext cx="731520" cy="731520"/>
           </a:xfrm>
           <a:prstGeom prst="ellipse">
@@ -4188,7 +4164,7 @@
         </p:blipFill>
         <p:spPr>
           <a:xfrm>
-            <a:off x="3410712" y="2176272"/>
+            <a:off x="3456432" y="2176272"/>
             <a:ext cx="402336" cy="402336"/>
           </a:xfrm>
           <a:prstGeom prst="rect">
@@ -4204,8 +4180,8 @@
         </p:nvSpPr>
         <p:spPr>
           <a:xfrm>
-            <a:off x="2715768" y="2971800"/>
-            <a:ext cx="1792224" cy="502920"/>
+            <a:off x="2761488" y="2926080"/>
+            <a:ext cx="1792224" cy="457200"/>
           </a:xfrm>
           <a:prstGeom prst="rect">
             <a:avLst/>
@@ -4221,7 +4197,7 @@
               <a:buNone/>
             </a:pPr>
             <a:r>
-              <a:rPr lang="en-US" sz="1600" b="1" dirty="0">
+              <a:rPr lang="en-US" sz="1500" b="1" dirty="0">
                 <a:solidFill>
                   <a:srgbClr val="012A30"/>
                 </a:solidFill>
@@ -4231,7 +4207,7 @@
               </a:rPr>
               <a:t>可视化编辑</a:t>
             </a:r>
-            <a:endParaRPr lang="en-US" sz="1600" dirty="0"/>
+            <a:endParaRPr lang="en-US" sz="1500" dirty="0"/>
           </a:p>
         </p:txBody>
       </p:sp>
@@ -4243,8 +4219,8 @@
         </p:nvSpPr>
         <p:spPr>
           <a:xfrm>
-            <a:off x="2743200" y="3520440"/>
-            <a:ext cx="1737360" cy="685800"/>
+            <a:off x="2816352" y="3429000"/>
+            <a:ext cx="1682496" cy="822960"/>
           </a:xfrm>
           <a:prstGeom prst="rect">
             <a:avLst/>
@@ -4282,13 +4258,11 @@
         </p:nvSpPr>
         <p:spPr>
           <a:xfrm>
-            <a:off x="4754880" y="1280160"/>
-            <a:ext cx="2011680" cy="3108960"/>
-          </a:xfrm>
-          <a:prstGeom prst="roundRect">
-            <a:avLst>
-              <a:gd name="adj" fmla="val 4545"/>
-            </a:avLst>
+            <a:off x="4846320" y="1280160"/>
+            <a:ext cx="2011680" cy="3154680"/>
+          </a:xfrm>
+          <a:prstGeom prst="rect">
+            <a:avLst/>
           </a:prstGeom>
           <a:solidFill>
             <a:srgbClr val="FFFFFF"/>
@@ -4311,7 +4285,7 @@
         </p:nvSpPr>
         <p:spPr>
           <a:xfrm>
-            <a:off x="4754880" y="1280160"/>
+            <a:off x="4846320" y="1280160"/>
             <a:ext cx="2011680" cy="109728"/>
           </a:xfrm>
           <a:prstGeom prst="rect">
@@ -4331,7 +4305,7 @@
         </p:nvSpPr>
         <p:spPr>
           <a:xfrm>
-            <a:off x="4892040" y="1554480"/>
+            <a:off x="4983480" y="1554480"/>
             <a:ext cx="1737360" cy="320040"/>
           </a:xfrm>
           <a:prstGeom prst="rect">
@@ -4370,7 +4344,7 @@
         </p:nvSpPr>
         <p:spPr>
           <a:xfrm>
-            <a:off x="5394960" y="2011680"/>
+            <a:off x="5486400" y="2011680"/>
             <a:ext cx="731520" cy="731520"/>
           </a:xfrm>
           <a:prstGeom prst="ellipse">
@@ -4398,7 +4372,7 @@
         </p:blipFill>
         <p:spPr>
           <a:xfrm>
-            <a:off x="5559552" y="2176272"/>
+            <a:off x="5650992" y="2176272"/>
             <a:ext cx="402336" cy="402336"/>
           </a:xfrm>
           <a:prstGeom prst="rect">
@@ -4414,8 +4388,8 @@
         </p:nvSpPr>
         <p:spPr>
           <a:xfrm>
-            <a:off x="4864608" y="2971800"/>
-            <a:ext cx="1792224" cy="502920"/>
+            <a:off x="4956048" y="2926080"/>
+            <a:ext cx="1792224" cy="457200"/>
           </a:xfrm>
           <a:prstGeom prst="rect">
             <a:avLst/>
@@ -4431,7 +4405,7 @@
               <a:buNone/>
             </a:pPr>
             <a:r>
-              <a:rPr lang="en-US" sz="1600" b="1" dirty="0">
+              <a:rPr lang="en-US" sz="1500" b="1" dirty="0">
                 <a:solidFill>
                   <a:srgbClr val="012A30"/>
                 </a:solidFill>
@@ -4441,7 +4415,7 @@
               </a:rPr>
               <a:t>一键部署分享</a:t>
             </a:r>
-            <a:endParaRPr lang="en-US" sz="1600" dirty="0"/>
+            <a:endParaRPr lang="en-US" sz="1500" dirty="0"/>
           </a:p>
         </p:txBody>
       </p:sp>
@@ -4453,8 +4427,8 @@
         </p:nvSpPr>
         <p:spPr>
           <a:xfrm>
-            <a:off x="4892040" y="3520440"/>
-            <a:ext cx="1737360" cy="685800"/>
+            <a:off x="5010912" y="3429000"/>
+            <a:ext cx="1682496" cy="822960"/>
           </a:xfrm>
           <a:prstGeom prst="rect">
             <a:avLst/>
@@ -4492,13 +4466,11 @@
         </p:nvSpPr>
         <p:spPr>
           <a:xfrm>
-            <a:off x="6903720" y="1280160"/>
-            <a:ext cx="2011680" cy="3108960"/>
-          </a:xfrm>
-          <a:prstGeom prst="roundRect">
-            <a:avLst>
-              <a:gd name="adj" fmla="val 4545"/>
-            </a:avLst>
+            <a:off x="7040880" y="1280160"/>
+            <a:ext cx="2011680" cy="3154680"/>
+          </a:xfrm>
+          <a:prstGeom prst="rect">
+            <a:avLst/>
           </a:prstGeom>
           <a:solidFill>
             <a:srgbClr val="FFFFFF"/>
@@ -4521,14 +4493,14 @@
         </p:nvSpPr>
         <p:spPr>
           <a:xfrm>
-            <a:off x="6903720" y="1280160"/>
+            <a:off x="7040880" y="1280160"/>
             <a:ext cx="2011680" cy="109728"/>
           </a:xfrm>
           <a:prstGeom prst="rect">
             <a:avLst/>
           </a:prstGeom>
           <a:solidFill>
-            <a:srgbClr val="02C39A"/>
+            <a:srgbClr val="028090"/>
           </a:solidFill>
           <a:ln/>
         </p:spPr>
@@ -4541,7 +4513,7 @@
         </p:nvSpPr>
         <p:spPr>
           <a:xfrm>
-            <a:off x="7040880" y="1554480"/>
+            <a:off x="7178040" y="1554480"/>
             <a:ext cx="1737360" cy="320040"/>
           </a:xfrm>
           <a:prstGeom prst="rect">
@@ -4580,7 +4552,7 @@
         </p:nvSpPr>
         <p:spPr>
           <a:xfrm>
-            <a:off x="7543800" y="2011680"/>
+            <a:off x="7680960" y="2011680"/>
             <a:ext cx="731520" cy="731520"/>
           </a:xfrm>
           <a:prstGeom prst="ellipse">
@@ -4608,7 +4580,7 @@
         </p:blipFill>
         <p:spPr>
           <a:xfrm>
-            <a:off x="7708392" y="2176272"/>
+            <a:off x="7845552" y="2176272"/>
             <a:ext cx="402336" cy="402336"/>
           </a:xfrm>
           <a:prstGeom prst="rect">
@@ -4624,8 +4596,8 @@
         </p:nvSpPr>
         <p:spPr>
           <a:xfrm>
-            <a:off x="7013448" y="2971800"/>
-            <a:ext cx="1792224" cy="502920"/>
+            <a:off x="7150608" y="2926080"/>
+            <a:ext cx="1792224" cy="457200"/>
           </a:xfrm>
           <a:prstGeom prst="rect">
             <a:avLst/>
@@ -4641,7 +4613,7 @@
               <a:buNone/>
             </a:pPr>
             <a:r>
-              <a:rPr lang="en-US" sz="1600" b="1" dirty="0">
+              <a:rPr lang="en-US" sz="1500" b="1" dirty="0">
                 <a:solidFill>
                   <a:srgbClr val="012A30"/>
                 </a:solidFill>
@@ -4651,7 +4623,7 @@
               </a:rPr>
               <a:t>企业级管理</a:t>
             </a:r>
-            <a:endParaRPr lang="en-US" sz="1600" dirty="0"/>
+            <a:endParaRPr lang="en-US" sz="1500" dirty="0"/>
           </a:p>
         </p:txBody>
       </p:sp>
@@ -4663,8 +4635,8 @@
         </p:nvSpPr>
         <p:spPr>
           <a:xfrm>
-            <a:off x="7040880" y="3520440"/>
-            <a:ext cx="1737360" cy="685800"/>
+            <a:off x="7205472" y="3429000"/>
+            <a:ext cx="1682496" cy="822960"/>
           </a:xfrm>
           <a:prstGeom prst="rect">
             <a:avLst/>
@@ -4702,8 +4674,8 @@
         </p:nvSpPr>
         <p:spPr>
           <a:xfrm>
-            <a:off x="0" y="4800600"/>
-            <a:ext cx="9144000" cy="342900"/>
+            <a:off x="0" y="4828032"/>
+            <a:ext cx="9144000" cy="315468"/>
           </a:xfrm>
           <a:prstGeom prst="rect">
             <a:avLst/>
@@ -4727,7 +4699,7 @@
         </p:nvSpPr>
         <p:spPr>
           <a:xfrm>
-            <a:off x="457200" y="4828032"/>
+            <a:off x="457200" y="4846320"/>
             <a:ext cx="5943600" cy="274320"/>
           </a:xfrm>
           <a:prstGeom prst="rect">
@@ -4746,7 +4718,7 @@
             <a:r>
               <a:rPr lang="en-US" sz="1100" dirty="0">
                 <a:solidFill>
-                  <a:srgbClr val="5A6F72"/>
+                  <a:srgbClr val="023C42"/>
                 </a:solidFill>
                 <a:latin typeface="Calibri" pitchFamily="34" charset="0"/>
                 <a:ea typeface="Calibri" pitchFamily="34" charset="-122"/>
@@ -4766,7 +4738,7 @@
         </p:nvSpPr>
         <p:spPr>
           <a:xfrm>
-            <a:off x="7498080" y="4828032"/>
+            <a:off x="7498080" y="4846320"/>
             <a:ext cx="1188720" cy="274320"/>
           </a:xfrm>
           <a:prstGeom prst="rect">
@@ -4785,7 +4757,7 @@
             <a:r>
               <a:rPr lang="en-US" sz="1100" dirty="0">
                 <a:solidFill>
-                  <a:srgbClr val="5A6F72"/>
+                  <a:srgbClr val="023C42"/>
                 </a:solidFill>
                 <a:latin typeface="Calibri" pitchFamily="34" charset="0"/>
                 <a:ea typeface="Calibri" pitchFamily="34" charset="-122"/>
@@ -4875,8 +4847,8 @@
         </p:nvSpPr>
         <p:spPr>
           <a:xfrm>
-            <a:off x="457200" y="256032"/>
-            <a:ext cx="8229600" cy="502920"/>
+            <a:off x="457200" y="292608"/>
+            <a:ext cx="8229600" cy="457200"/>
           </a:xfrm>
           <a:prstGeom prst="rect">
             <a:avLst/>
@@ -4892,7 +4864,7 @@
               <a:buNone/>
             </a:pPr>
             <a:r>
-              <a:rPr lang="en-US" sz="3600" b="1" dirty="0">
+              <a:rPr lang="en-US" sz="3400" b="1" dirty="0">
                 <a:solidFill>
                   <a:srgbClr val="012A30"/>
                 </a:solidFill>
@@ -4902,7 +4874,7 @@
               </a:rPr>
               <a:t>近期进展</a:t>
             </a:r>
-            <a:endParaRPr lang="en-US" sz="3600" dirty="0"/>
+            <a:endParaRPr lang="en-US" sz="3400" dirty="0"/>
           </a:p>
         </p:txBody>
       </p:sp>
@@ -4914,7 +4886,7 @@
         </p:nvSpPr>
         <p:spPr>
           <a:xfrm>
-            <a:off x="457200" y="822960"/>
+            <a:off x="457200" y="804672"/>
             <a:ext cx="8229600" cy="274320"/>
           </a:xfrm>
           <a:prstGeom prst="rect">
@@ -4933,7 +4905,7 @@
             <a:r>
               <a:rPr lang="en-US" sz="1400" i="1" dirty="0">
                 <a:solidFill>
-                  <a:srgbClr val="5A6F72"/>
+                  <a:srgbClr val="3D5558"/>
                 </a:solidFill>
                 <a:latin typeface="Calibri" pitchFamily="34" charset="0"/>
                 <a:ea typeface="Calibri" pitchFamily="34" charset="-122"/>
@@ -4953,12 +4925,12 @@
         </p:nvSpPr>
         <p:spPr>
           <a:xfrm>
-            <a:off x="457200" y="1280160"/>
-            <a:ext cx="2926080" cy="3108960"/>
+            <a:off x="457200" y="1234440"/>
+            <a:ext cx="2880360" cy="3200400"/>
           </a:xfrm>
           <a:prstGeom prst="roundRect">
             <a:avLst>
-              <a:gd name="adj" fmla="val 3750"/>
+              <a:gd name="adj" fmla="val 3810"/>
             </a:avLst>
           </a:prstGeom>
           <a:solidFill>
@@ -4983,8 +4955,8 @@
         </p:blipFill>
         <p:spPr>
           <a:xfrm>
-            <a:off x="731520" y="1554480"/>
-            <a:ext cx="411480" cy="411480"/>
+            <a:off x="685800" y="1463040"/>
+            <a:ext cx="365760" cy="365760"/>
           </a:xfrm>
           <a:prstGeom prst="rect">
             <a:avLst/>
@@ -4999,8 +4971,8 @@
         </p:nvSpPr>
         <p:spPr>
           <a:xfrm>
-            <a:off x="1280160" y="1600200"/>
-            <a:ext cx="1920240" cy="365760"/>
+            <a:off x="1188720" y="1508760"/>
+            <a:ext cx="1965960" cy="320040"/>
           </a:xfrm>
           <a:prstGeom prst="rect">
             <a:avLst/>
@@ -5016,7 +4988,7 @@
               <a:buNone/>
             </a:pPr>
             <a:r>
-              <a:rPr lang="en-US" sz="1400" b="1" dirty="0">
+              <a:rPr lang="en-US" sz="1300" b="1" dirty="0">
                 <a:solidFill>
                   <a:srgbClr val="FFFFFF"/>
                 </a:solidFill>
@@ -5026,44 +4998,139 @@
               </a:rPr>
               <a:t>日报自动化持续产出</a:t>
             </a:r>
+            <a:endParaRPr lang="en-US" sz="1300" dirty="0"/>
+          </a:p>
+        </p:txBody>
+      </p:sp>
+      <p:sp>
+        <p:nvSpPr>
+          <p:cNvPr id="9" name="Text 6"/>
+          <p:cNvSpPr/>
+          <p:nvPr/>
+        </p:nvSpPr>
+        <p:spPr>
+          <a:xfrm>
+            <a:off x="685800" y="2148840"/>
+            <a:ext cx="2377440" cy="256032"/>
+          </a:xfrm>
+          <a:prstGeom prst="rect">
+            <a:avLst/>
+          </a:prstGeom>
+          <a:noFill/>
+          <a:ln/>
+        </p:spPr>
+        <p:txBody>
+          <a:bodyPr wrap="square" lIns="0" tIns="0" rIns="0" bIns="0" rtlCol="0" anchor="ctr"/>
+          <a:lstStyle/>
+          <a:p>
+            <a:pPr indent="0" marL="0">
+              <a:buNone/>
+            </a:pPr>
+            <a:r>
+              <a:rPr lang="en-US" sz="1200" dirty="0">
+                <a:solidFill>
+                  <a:srgbClr val="02C39A"/>
+                </a:solidFill>
+                <a:latin typeface="Calibri" pitchFamily="34" charset="0"/>
+                <a:ea typeface="Calibri" pitchFamily="34" charset="-122"/>
+                <a:cs typeface="Calibri" pitchFamily="34" charset="-120"/>
+              </a:rPr>
+              <a:t>昨日</a:t>
+            </a:r>
+            <a:endParaRPr lang="en-US" sz="1200" dirty="0"/>
+          </a:p>
+        </p:txBody>
+      </p:sp>
+      <p:sp>
+        <p:nvSpPr>
+          <p:cNvPr id="10" name="Text 7"/>
+          <p:cNvSpPr/>
+          <p:nvPr/>
+        </p:nvSpPr>
+        <p:spPr>
+          <a:xfrm>
+            <a:off x="685800" y="2468880"/>
+            <a:ext cx="2423160" cy="640080"/>
+          </a:xfrm>
+          <a:prstGeom prst="rect">
+            <a:avLst/>
+          </a:prstGeom>
+          <a:noFill/>
+          <a:ln/>
+        </p:spPr>
+        <p:txBody>
+          <a:bodyPr wrap="square" lIns="0" tIns="0" rIns="0" bIns="0" rtlCol="0" anchor="ctr"/>
+          <a:lstStyle/>
+          <a:p>
+            <a:pPr indent="0" marL="0">
+              <a:buNone/>
+            </a:pPr>
+            <a:r>
+              <a:rPr lang="en-US" sz="1400" dirty="0">
+                <a:solidFill>
+                  <a:srgbClr val="FFFFFF"/>
+                </a:solidFill>
+                <a:latin typeface="Calibri" pitchFamily="34" charset="0"/>
+                <a:ea typeface="Calibri" pitchFamily="34" charset="-122"/>
+                <a:cs typeface="Calibri" pitchFamily="34" charset="-120"/>
+              </a:rPr>
+              <a:t>2026-08-01 状态 PPT</a:t>
+            </a:r>
             <a:endParaRPr lang="en-US" sz="1400" dirty="0"/>
           </a:p>
-        </p:txBody>
-      </p:sp>
-      <p:sp>
-        <p:nvSpPr>
-          <p:cNvPr id="9" name="Text 6"/>
-          <p:cNvSpPr/>
-          <p:nvPr/>
-        </p:nvSpPr>
-        <p:spPr>
-          <a:xfrm>
-            <a:off x="731520" y="2240280"/>
-            <a:ext cx="2377440" cy="274320"/>
-          </a:xfrm>
-          <a:prstGeom prst="rect">
-            <a:avLst/>
-          </a:prstGeom>
-          <a:noFill/>
-          <a:ln/>
-        </p:spPr>
-        <p:txBody>
-          <a:bodyPr wrap="square" lIns="0" tIns="0" rIns="0" bIns="0" rtlCol="0" anchor="ctr"/>
-          <a:lstStyle/>
           <a:p>
             <a:pPr indent="0" marL="0">
               <a:buNone/>
             </a:pPr>
             <a:r>
+              <a:rPr lang="en-US" sz="1400" dirty="0">
+                <a:solidFill>
+                  <a:srgbClr val="FFFFFF"/>
+                </a:solidFill>
+                <a:latin typeface="Calibri" pitchFamily="34" charset="0"/>
+                <a:ea typeface="Calibri" pitchFamily="34" charset="-122"/>
+                <a:cs typeface="Calibri" pitchFamily="34" charset="-120"/>
+              </a:rPr>
+              <a:t>已生成（PR #72 Draft）</a:t>
+            </a:r>
+            <a:endParaRPr lang="en-US" sz="1400" dirty="0"/>
+          </a:p>
+        </p:txBody>
+      </p:sp>
+      <p:sp>
+        <p:nvSpPr>
+          <p:cNvPr id="11" name="Text 8"/>
+          <p:cNvSpPr/>
+          <p:nvPr/>
+        </p:nvSpPr>
+        <p:spPr>
+          <a:xfrm>
+            <a:off x="685800" y="3291840"/>
+            <a:ext cx="2377440" cy="228600"/>
+          </a:xfrm>
+          <a:prstGeom prst="rect">
+            <a:avLst/>
+          </a:prstGeom>
+          <a:noFill/>
+          <a:ln/>
+        </p:spPr>
+        <p:txBody>
+          <a:bodyPr wrap="square" lIns="0" tIns="0" rIns="0" bIns="0" rtlCol="0" anchor="ctr"/>
+          <a:lstStyle/>
+          <a:p>
+            <a:pPr indent="0" marL="0">
+              <a:buNone/>
+            </a:pPr>
+            <a:r>
               <a:rPr lang="en-US" sz="1200" dirty="0">
                 <a:solidFill>
-                  <a:srgbClr val="02C39A"/>
-                </a:solidFill>
-                <a:latin typeface="Calibri" pitchFamily="34" charset="0"/>
-                <a:ea typeface="Calibri" pitchFamily="34" charset="-122"/>
-                <a:cs typeface="Calibri" pitchFamily="34" charset="-120"/>
-              </a:rPr>
-              <a:t>昨日</a:t>
+                  <a:srgbClr val="B8E0D8"/>
+                </a:solidFill>
+                <a:latin typeface="Calibri" pitchFamily="34" charset="0"/>
+                <a:ea typeface="Calibri" pitchFamily="34" charset="-122"/>
+                <a:cs typeface="Calibri" pitchFamily="34" charset="-120"/>
+              </a:rPr>
+              <a:t>业务代码提交</a:t>
             </a:r>
             <a:endParaRPr lang="en-US" sz="1200" dirty="0"/>
           </a:p>
@@ -5071,109 +5138,14 @@
       </p:sp>
       <p:sp>
         <p:nvSpPr>
-          <p:cNvPr id="10" name="Text 7"/>
-          <p:cNvSpPr/>
-          <p:nvPr/>
-        </p:nvSpPr>
-        <p:spPr>
-          <a:xfrm>
-            <a:off x="731520" y="2560320"/>
-            <a:ext cx="2377440" cy="640080"/>
-          </a:xfrm>
-          <a:prstGeom prst="rect">
-            <a:avLst/>
-          </a:prstGeom>
-          <a:noFill/>
-          <a:ln/>
-        </p:spPr>
-        <p:txBody>
-          <a:bodyPr wrap="square" lIns="0" tIns="0" rIns="0" bIns="0" rtlCol="0" anchor="ctr"/>
-          <a:lstStyle/>
-          <a:p>
-            <a:pPr indent="0" marL="0">
-              <a:buNone/>
-            </a:pPr>
-            <a:r>
-              <a:rPr lang="en-US" sz="1500" dirty="0">
-                <a:solidFill>
-                  <a:srgbClr val="FFFFFF"/>
-                </a:solidFill>
-                <a:latin typeface="Calibri" pitchFamily="34" charset="0"/>
-                <a:ea typeface="Calibri" pitchFamily="34" charset="-122"/>
-                <a:cs typeface="Calibri" pitchFamily="34" charset="-120"/>
-              </a:rPr>
-              <a:t>2026-08-01 状态 PPT</a:t>
-            </a:r>
-            <a:endParaRPr lang="en-US" sz="1500" dirty="0"/>
-          </a:p>
-          <a:p>
-            <a:pPr indent="0" marL="0">
-              <a:buNone/>
-            </a:pPr>
-            <a:r>
-              <a:rPr lang="en-US" sz="1500" dirty="0">
-                <a:solidFill>
-                  <a:srgbClr val="FFFFFF"/>
-                </a:solidFill>
-                <a:latin typeface="Calibri" pitchFamily="34" charset="0"/>
-                <a:ea typeface="Calibri" pitchFamily="34" charset="-122"/>
-                <a:cs typeface="Calibri" pitchFamily="34" charset="-120"/>
-              </a:rPr>
-              <a:t>已生成（PR #72 Draft）</a:t>
-            </a:r>
-            <a:endParaRPr lang="en-US" sz="1500" dirty="0"/>
-          </a:p>
-        </p:txBody>
-      </p:sp>
-      <p:sp>
-        <p:nvSpPr>
-          <p:cNvPr id="11" name="Text 8"/>
-          <p:cNvSpPr/>
-          <p:nvPr/>
-        </p:nvSpPr>
-        <p:spPr>
-          <a:xfrm>
-            <a:off x="731520" y="3337560"/>
-            <a:ext cx="2377440" cy="228600"/>
-          </a:xfrm>
-          <a:prstGeom prst="rect">
-            <a:avLst/>
-          </a:prstGeom>
-          <a:noFill/>
-          <a:ln/>
-        </p:spPr>
-        <p:txBody>
-          <a:bodyPr wrap="square" lIns="0" tIns="0" rIns="0" bIns="0" rtlCol="0" anchor="ctr"/>
-          <a:lstStyle/>
-          <a:p>
-            <a:pPr indent="0" marL="0">
-              <a:buNone/>
-            </a:pPr>
-            <a:r>
-              <a:rPr lang="en-US" sz="1200" dirty="0">
-                <a:solidFill>
-                  <a:srgbClr val="A8D5CE"/>
-                </a:solidFill>
-                <a:latin typeface="Calibri" pitchFamily="34" charset="0"/>
-                <a:ea typeface="Calibri" pitchFamily="34" charset="-122"/>
-                <a:cs typeface="Calibri" pitchFamily="34" charset="-120"/>
-              </a:rPr>
-              <a:t>业务代码提交</a:t>
-            </a:r>
-            <a:endParaRPr lang="en-US" sz="1200" dirty="0"/>
-          </a:p>
-        </p:txBody>
-      </p:sp>
-      <p:sp>
-        <p:nvSpPr>
           <p:cNvPr id="12" name="Text 9"/>
           <p:cNvSpPr/>
           <p:nvPr/>
         </p:nvSpPr>
         <p:spPr>
           <a:xfrm>
-            <a:off x="731520" y="3611880"/>
-            <a:ext cx="2377440" cy="502920"/>
+            <a:off x="685800" y="3566160"/>
+            <a:ext cx="2377440" cy="548640"/>
           </a:xfrm>
           <a:prstGeom prst="rect">
             <a:avLst/>
@@ -5211,7 +5183,7 @@
         </p:nvSpPr>
         <p:spPr>
           <a:xfrm>
-            <a:off x="3611880" y="1280160"/>
+            <a:off x="3611880" y="1234440"/>
             <a:ext cx="5074920" cy="960120"/>
           </a:xfrm>
           <a:prstGeom prst="roundRect">
@@ -5240,7 +5212,7 @@
         </p:nvSpPr>
         <p:spPr>
           <a:xfrm>
-            <a:off x="3794760" y="1536192"/>
+            <a:off x="3794760" y="1490472"/>
             <a:ext cx="777240" cy="411480"/>
           </a:xfrm>
           <a:prstGeom prst="roundRect">
@@ -5262,7 +5234,7 @@
         </p:nvSpPr>
         <p:spPr>
           <a:xfrm>
-            <a:off x="3794760" y="1536192"/>
+            <a:off x="3794760" y="1490472"/>
             <a:ext cx="777240" cy="411480"/>
           </a:xfrm>
           <a:prstGeom prst="rect">
@@ -5301,7 +5273,7 @@
         </p:nvSpPr>
         <p:spPr>
           <a:xfrm>
-            <a:off x="4709160" y="1417320"/>
+            <a:off x="4709160" y="1371600"/>
             <a:ext cx="3749040" cy="320040"/>
           </a:xfrm>
           <a:prstGeom prst="rect">
@@ -5340,7 +5312,7 @@
         </p:nvSpPr>
         <p:spPr>
           <a:xfrm>
-            <a:off x="4709160" y="1737360"/>
+            <a:off x="4709160" y="1691640"/>
             <a:ext cx="3749040" cy="411480"/>
           </a:xfrm>
           <a:prstGeom prst="rect">
@@ -5550,7 +5522,7 @@
                 <a:ea typeface="Calibri" pitchFamily="34" charset="-122"/>
                 <a:cs typeface="Calibri" pitchFamily="34" charset="-120"/>
               </a:rPr>
-              <a:t>user / app / ai / screenshot / client / common / model</a:t>
+              <a:t>7 模块：user / app / ai / screenshot 等</a:t>
             </a:r>
             <a:endParaRPr lang="en-US" sz="1200" dirty="0"/>
           </a:p>
@@ -5564,7 +5536,7 @@
         </p:nvSpPr>
         <p:spPr>
           <a:xfrm>
-            <a:off x="3611880" y="3383280"/>
+            <a:off x="3611880" y="3429000"/>
             <a:ext cx="5074920" cy="960120"/>
           </a:xfrm>
           <a:prstGeom prst="roundRect">
@@ -5593,7 +5565,7 @@
         </p:nvSpPr>
         <p:spPr>
           <a:xfrm>
-            <a:off x="3794760" y="3639312"/>
+            <a:off x="3794760" y="3685032"/>
             <a:ext cx="777240" cy="411480"/>
           </a:xfrm>
           <a:prstGeom prst="roundRect">
@@ -5615,7 +5587,7 @@
         </p:nvSpPr>
         <p:spPr>
           <a:xfrm>
-            <a:off x="3794760" y="3639312"/>
+            <a:off x="3794760" y="3685032"/>
             <a:ext cx="777240" cy="411480"/>
           </a:xfrm>
           <a:prstGeom prst="rect">
@@ -5654,7 +5626,7 @@
         </p:nvSpPr>
         <p:spPr>
           <a:xfrm>
-            <a:off x="4709160" y="3520440"/>
+            <a:off x="4709160" y="3566160"/>
             <a:ext cx="3749040" cy="320040"/>
           </a:xfrm>
           <a:prstGeom prst="rect">
@@ -5693,7 +5665,7 @@
         </p:nvSpPr>
         <p:spPr>
           <a:xfrm>
-            <a:off x="4709160" y="3840480"/>
+            <a:off x="4709160" y="3886200"/>
             <a:ext cx="3749040" cy="411480"/>
           </a:xfrm>
           <a:prstGeom prst="rect">
@@ -5732,8 +5704,8 @@
         </p:nvSpPr>
         <p:spPr>
           <a:xfrm>
-            <a:off x="0" y="4800600"/>
-            <a:ext cx="9144000" cy="342900"/>
+            <a:off x="0" y="4828032"/>
+            <a:ext cx="9144000" cy="315468"/>
           </a:xfrm>
           <a:prstGeom prst="rect">
             <a:avLst/>
@@ -5757,7 +5729,7 @@
         </p:nvSpPr>
         <p:spPr>
           <a:xfrm>
-            <a:off x="457200" y="4828032"/>
+            <a:off x="457200" y="4846320"/>
             <a:ext cx="5943600" cy="274320"/>
           </a:xfrm>
           <a:prstGeom prst="rect">
@@ -5776,7 +5748,7 @@
             <a:r>
               <a:rPr lang="en-US" sz="1100" dirty="0">
                 <a:solidFill>
-                  <a:srgbClr val="5A6F72"/>
+                  <a:srgbClr val="023C42"/>
                 </a:solidFill>
                 <a:latin typeface="Calibri" pitchFamily="34" charset="0"/>
                 <a:ea typeface="Calibri" pitchFamily="34" charset="-122"/>
@@ -5796,7 +5768,7 @@
         </p:nvSpPr>
         <p:spPr>
           <a:xfrm>
-            <a:off x="7498080" y="4828032"/>
+            <a:off x="7498080" y="4846320"/>
             <a:ext cx="1188720" cy="274320"/>
           </a:xfrm>
           <a:prstGeom prst="rect">
@@ -5815,7 +5787,7 @@
             <a:r>
               <a:rPr lang="en-US" sz="1100" dirty="0">
                 <a:solidFill>
-                  <a:srgbClr val="5A6F72"/>
+                  <a:srgbClr val="023C42"/>
                 </a:solidFill>
                 <a:latin typeface="Calibri" pitchFamily="34" charset="0"/>
                 <a:ea typeface="Calibri" pitchFamily="34" charset="-122"/>
@@ -5905,8 +5877,8 @@
         </p:nvSpPr>
         <p:spPr>
           <a:xfrm>
-            <a:off x="457200" y="256032"/>
-            <a:ext cx="8229600" cy="502920"/>
+            <a:off x="457200" y="292608"/>
+            <a:ext cx="8229600" cy="457200"/>
           </a:xfrm>
           <a:prstGeom prst="rect">
             <a:avLst/>
@@ -5922,7 +5894,7 @@
               <a:buNone/>
             </a:pPr>
             <a:r>
-              <a:rPr lang="en-US" sz="3600" b="1" dirty="0">
+              <a:rPr lang="en-US" sz="3400" b="1" dirty="0">
                 <a:solidFill>
                   <a:srgbClr val="012A30"/>
                 </a:solidFill>
@@ -5932,7 +5904,7 @@
               </a:rPr>
               <a:t>模块架构要点</a:t>
             </a:r>
-            <a:endParaRPr lang="en-US" sz="3600" dirty="0"/>
+            <a:endParaRPr lang="en-US" sz="3400" dirty="0"/>
           </a:p>
         </p:txBody>
       </p:sp>
@@ -5944,7 +5916,7 @@
         </p:nvSpPr>
         <p:spPr>
           <a:xfrm>
-            <a:off x="457200" y="822960"/>
+            <a:off x="457200" y="804672"/>
             <a:ext cx="8229600" cy="274320"/>
           </a:xfrm>
           <a:prstGeom prst="rect">
@@ -5963,7 +5935,7 @@
             <a:r>
               <a:rPr lang="en-US" sz="1400" i="1" dirty="0">
                 <a:solidFill>
-                  <a:srgbClr val="5A6F72"/>
+                  <a:srgbClr val="3D5558"/>
                 </a:solidFill>
                 <a:latin typeface="Calibri" pitchFamily="34" charset="0"/>
                 <a:ea typeface="Calibri" pitchFamily="34" charset="-122"/>
@@ -5984,12 +5956,10 @@
         <p:spPr>
           <a:xfrm>
             <a:off x="457200" y="1234440"/>
-            <a:ext cx="4114800" cy="3200400"/>
-          </a:xfrm>
-          <a:prstGeom prst="roundRect">
-            <a:avLst>
-              <a:gd name="adj" fmla="val 2857"/>
-            </a:avLst>
+            <a:ext cx="4023360" cy="3200400"/>
+          </a:xfrm>
+          <a:prstGeom prst="rect">
+            <a:avLst/>
           </a:prstGeom>
           <a:solidFill>
             <a:srgbClr val="FFFFFF"/>
@@ -6013,7 +5983,7 @@
         <p:spPr>
           <a:xfrm>
             <a:off x="457200" y="1234440"/>
-            <a:ext cx="4114800" cy="502920"/>
+            <a:ext cx="4023360" cy="502920"/>
           </a:xfrm>
           <a:prstGeom prst="rect">
             <a:avLst/>
@@ -6096,7 +6066,7 @@
         <p:spPr>
           <a:xfrm>
             <a:off x="685800" y="1965960"/>
-            <a:ext cx="3657600" cy="2194560"/>
+            <a:ext cx="3566160" cy="2194560"/>
           </a:xfrm>
           <a:prstGeom prst="rect">
             <a:avLst/>
@@ -6210,10 +6180,8 @@
             <a:off x="4754880" y="1234440"/>
             <a:ext cx="3931920" cy="3200400"/>
           </a:xfrm>
-          <a:prstGeom prst="roundRect">
-            <a:avLst>
-              <a:gd name="adj" fmla="val 2857"/>
-            </a:avLst>
+          <a:prstGeom prst="rect">
+            <a:avLst/>
           </a:prstGeom>
           <a:solidFill>
             <a:srgbClr val="FFFFFF"/>
@@ -6243,7 +6211,7 @@
             <a:avLst/>
           </a:prstGeom>
           <a:solidFill>
-            <a:srgbClr val="00A896"/>
+            <a:srgbClr val="028090"/>
           </a:solidFill>
           <a:ln/>
         </p:spPr>
@@ -6341,23 +6309,62 @@
         </p:nvSpPr>
         <p:spPr>
           <a:xfrm>
-            <a:off x="4983480" y="1965960"/>
-            <a:ext cx="1691640" cy="457200"/>
-          </a:xfrm>
-          <a:prstGeom prst="rect">
-            <a:avLst/>
-          </a:prstGeom>
-          <a:noFill/>
-          <a:ln/>
-        </p:spPr>
-        <p:txBody>
-          <a:bodyPr wrap="square" lIns="0" tIns="0" rIns="0" bIns="0" rtlCol="0" anchor="ctr"/>
+            <a:off x="5056632" y="1965960"/>
+            <a:ext cx="1554480" cy="237744"/>
+          </a:xfrm>
+          <a:prstGeom prst="rect">
+            <a:avLst/>
+          </a:prstGeom>
+          <a:noFill/>
+          <a:ln/>
+        </p:spPr>
+        <p:txBody>
+          <a:bodyPr wrap="square" lIns="0" tIns="0" rIns="0" bIns="0" rtlCol="0" anchor="b"/>
           <a:lstStyle/>
           <a:p>
             <a:pPr algn="ctr" indent="0" marL="0">
               <a:buNone/>
             </a:pPr>
             <a:r>
+              <a:rPr lang="en-US" sz="1100" b="1" dirty="0">
+                <a:solidFill>
+                  <a:srgbClr val="028090"/>
+                </a:solidFill>
+                <a:latin typeface="Calibri" pitchFamily="34" charset="0"/>
+                <a:ea typeface="Calibri" pitchFamily="34" charset="-122"/>
+                <a:cs typeface="Calibri" pitchFamily="34" charset="-120"/>
+              </a:rPr>
+              <a:t>user</a:t>
+            </a:r>
+            <a:endParaRPr lang="en-US" sz="1100" dirty="0"/>
+          </a:p>
+        </p:txBody>
+      </p:sp>
+      <p:sp>
+        <p:nvSpPr>
+          <p:cNvPr id="17" name="Text 13"/>
+          <p:cNvSpPr/>
+          <p:nvPr/>
+        </p:nvSpPr>
+        <p:spPr>
+          <a:xfrm>
+            <a:off x="5056632" y="2185416"/>
+            <a:ext cx="1554480" cy="201168"/>
+          </a:xfrm>
+          <a:prstGeom prst="rect">
+            <a:avLst/>
+          </a:prstGeom>
+          <a:noFill/>
+          <a:ln/>
+        </p:spPr>
+        <p:txBody>
+          <a:bodyPr wrap="square" lIns="0" tIns="0" rIns="0" bIns="0" rtlCol="0" anchor="t"/>
+          <a:lstStyle/>
+          <a:p>
+            <a:pPr algn="ctr" indent="0" marL="0">
+              <a:buNone/>
+            </a:pPr>
+            <a:r>
               <a:rPr lang="en-US" sz="1100" dirty="0">
                 <a:solidFill>
                   <a:srgbClr val="012A30"/>
@@ -6366,7 +6373,7 @@
                 <a:ea typeface="Calibri" pitchFamily="34" charset="-122"/>
                 <a:cs typeface="Calibri" pitchFamily="34" charset="-120"/>
               </a:rPr>
-              <a:t>user  用户服务</a:t>
+              <a:t>用户服务</a:t>
             </a:r>
             <a:endParaRPr lang="en-US" sz="1100" dirty="0"/>
           </a:p>
@@ -6374,7 +6381,7 @@
       </p:sp>
       <p:sp>
         <p:nvSpPr>
-          <p:cNvPr id="17" name="Shape 13"/>
+          <p:cNvPr id="18" name="Shape 14"/>
           <p:cNvSpPr/>
           <p:nvPr/>
         </p:nvSpPr>
@@ -6396,29 +6403,68 @@
       </p:sp>
       <p:sp>
         <p:nvSpPr>
-          <p:cNvPr id="18" name="Text 14"/>
-          <p:cNvSpPr/>
-          <p:nvPr/>
-        </p:nvSpPr>
-        <p:spPr>
-          <a:xfrm>
-            <a:off x="6812280" y="1965960"/>
-            <a:ext cx="1691640" cy="457200"/>
-          </a:xfrm>
-          <a:prstGeom prst="rect">
-            <a:avLst/>
-          </a:prstGeom>
-          <a:noFill/>
-          <a:ln/>
-        </p:spPr>
-        <p:txBody>
-          <a:bodyPr wrap="square" lIns="0" tIns="0" rIns="0" bIns="0" rtlCol="0" anchor="ctr"/>
+          <p:cNvPr id="19" name="Text 15"/>
+          <p:cNvSpPr/>
+          <p:nvPr/>
+        </p:nvSpPr>
+        <p:spPr>
+          <a:xfrm>
+            <a:off x="6885432" y="1965960"/>
+            <a:ext cx="1554480" cy="237744"/>
+          </a:xfrm>
+          <a:prstGeom prst="rect">
+            <a:avLst/>
+          </a:prstGeom>
+          <a:noFill/>
+          <a:ln/>
+        </p:spPr>
+        <p:txBody>
+          <a:bodyPr wrap="square" lIns="0" tIns="0" rIns="0" bIns="0" rtlCol="0" anchor="b"/>
           <a:lstStyle/>
           <a:p>
             <a:pPr algn="ctr" indent="0" marL="0">
               <a:buNone/>
             </a:pPr>
             <a:r>
+              <a:rPr lang="en-US" sz="1100" b="1" dirty="0">
+                <a:solidFill>
+                  <a:srgbClr val="028090"/>
+                </a:solidFill>
+                <a:latin typeface="Calibri" pitchFamily="34" charset="0"/>
+                <a:ea typeface="Calibri" pitchFamily="34" charset="-122"/>
+                <a:cs typeface="Calibri" pitchFamily="34" charset="-120"/>
+              </a:rPr>
+              <a:t>app</a:t>
+            </a:r>
+            <a:endParaRPr lang="en-US" sz="1100" dirty="0"/>
+          </a:p>
+        </p:txBody>
+      </p:sp>
+      <p:sp>
+        <p:nvSpPr>
+          <p:cNvPr id="20" name="Text 16"/>
+          <p:cNvSpPr/>
+          <p:nvPr/>
+        </p:nvSpPr>
+        <p:spPr>
+          <a:xfrm>
+            <a:off x="6885432" y="2185416"/>
+            <a:ext cx="1554480" cy="201168"/>
+          </a:xfrm>
+          <a:prstGeom prst="rect">
+            <a:avLst/>
+          </a:prstGeom>
+          <a:noFill/>
+          <a:ln/>
+        </p:spPr>
+        <p:txBody>
+          <a:bodyPr wrap="square" lIns="0" tIns="0" rIns="0" bIns="0" rtlCol="0" anchor="t"/>
+          <a:lstStyle/>
+          <a:p>
+            <a:pPr algn="ctr" indent="0" marL="0">
+              <a:buNone/>
+            </a:pPr>
+            <a:r>
               <a:rPr lang="en-US" sz="1100" dirty="0">
                 <a:solidFill>
                   <a:srgbClr val="012A30"/>
@@ -6427,7 +6473,7 @@
                 <a:ea typeface="Calibri" pitchFamily="34" charset="-122"/>
                 <a:cs typeface="Calibri" pitchFamily="34" charset="-120"/>
               </a:rPr>
-              <a:t>app  应用服务</a:t>
+              <a:t>应用服务</a:t>
             </a:r>
             <a:endParaRPr lang="en-US" sz="1100" dirty="0"/>
           </a:p>
@@ -6435,13 +6481,13 @@
       </p:sp>
       <p:sp>
         <p:nvSpPr>
-          <p:cNvPr id="19" name="Shape 15"/>
-          <p:cNvSpPr/>
-          <p:nvPr/>
-        </p:nvSpPr>
-        <p:spPr>
-          <a:xfrm>
-            <a:off x="4983480" y="2514600"/>
+          <p:cNvPr id="21" name="Shape 17"/>
+          <p:cNvSpPr/>
+          <p:nvPr/>
+        </p:nvSpPr>
+        <p:spPr>
+          <a:xfrm>
+            <a:off x="4983480" y="2532888"/>
             <a:ext cx="1691640" cy="457200"/>
           </a:xfrm>
           <a:prstGeom prst="roundRect">
@@ -6457,29 +6503,68 @@
       </p:sp>
       <p:sp>
         <p:nvSpPr>
-          <p:cNvPr id="20" name="Text 16"/>
-          <p:cNvSpPr/>
-          <p:nvPr/>
-        </p:nvSpPr>
-        <p:spPr>
-          <a:xfrm>
-            <a:off x="4983480" y="2514600"/>
-            <a:ext cx="1691640" cy="457200"/>
-          </a:xfrm>
-          <a:prstGeom prst="rect">
-            <a:avLst/>
-          </a:prstGeom>
-          <a:noFill/>
-          <a:ln/>
-        </p:spPr>
-        <p:txBody>
-          <a:bodyPr wrap="square" lIns="0" tIns="0" rIns="0" bIns="0" rtlCol="0" anchor="ctr"/>
+          <p:cNvPr id="22" name="Text 18"/>
+          <p:cNvSpPr/>
+          <p:nvPr/>
+        </p:nvSpPr>
+        <p:spPr>
+          <a:xfrm>
+            <a:off x="5056632" y="2532888"/>
+            <a:ext cx="1554480" cy="237744"/>
+          </a:xfrm>
+          <a:prstGeom prst="rect">
+            <a:avLst/>
+          </a:prstGeom>
+          <a:noFill/>
+          <a:ln/>
+        </p:spPr>
+        <p:txBody>
+          <a:bodyPr wrap="square" lIns="0" tIns="0" rIns="0" bIns="0" rtlCol="0" anchor="b"/>
           <a:lstStyle/>
           <a:p>
             <a:pPr algn="ctr" indent="0" marL="0">
               <a:buNone/>
             </a:pPr>
             <a:r>
+              <a:rPr lang="en-US" sz="1100" b="1" dirty="0">
+                <a:solidFill>
+                  <a:srgbClr val="028090"/>
+                </a:solidFill>
+                <a:latin typeface="Calibri" pitchFamily="34" charset="0"/>
+                <a:ea typeface="Calibri" pitchFamily="34" charset="-122"/>
+                <a:cs typeface="Calibri" pitchFamily="34" charset="-120"/>
+              </a:rPr>
+              <a:t>ai</a:t>
+            </a:r>
+            <a:endParaRPr lang="en-US" sz="1100" dirty="0"/>
+          </a:p>
+        </p:txBody>
+      </p:sp>
+      <p:sp>
+        <p:nvSpPr>
+          <p:cNvPr id="23" name="Text 19"/>
+          <p:cNvSpPr/>
+          <p:nvPr/>
+        </p:nvSpPr>
+        <p:spPr>
+          <a:xfrm>
+            <a:off x="5056632" y="2752344"/>
+            <a:ext cx="1554480" cy="201168"/>
+          </a:xfrm>
+          <a:prstGeom prst="rect">
+            <a:avLst/>
+          </a:prstGeom>
+          <a:noFill/>
+          <a:ln/>
+        </p:spPr>
+        <p:txBody>
+          <a:bodyPr wrap="square" lIns="0" tIns="0" rIns="0" bIns="0" rtlCol="0" anchor="t"/>
+          <a:lstStyle/>
+          <a:p>
+            <a:pPr algn="ctr" indent="0" marL="0">
+              <a:buNone/>
+            </a:pPr>
+            <a:r>
               <a:rPr lang="en-US" sz="1100" dirty="0">
                 <a:solidFill>
                   <a:srgbClr val="012A30"/>
@@ -6488,7 +6573,7 @@
                 <a:ea typeface="Calibri" pitchFamily="34" charset="-122"/>
                 <a:cs typeface="Calibri" pitchFamily="34" charset="-120"/>
               </a:rPr>
-              <a:t>ai  AI 生成</a:t>
+              <a:t>AI 生成</a:t>
             </a:r>
             <a:endParaRPr lang="en-US" sz="1100" dirty="0"/>
           </a:p>
@@ -6496,13 +6581,13 @@
       </p:sp>
       <p:sp>
         <p:nvSpPr>
-          <p:cNvPr id="21" name="Shape 17"/>
-          <p:cNvSpPr/>
-          <p:nvPr/>
-        </p:nvSpPr>
-        <p:spPr>
-          <a:xfrm>
-            <a:off x="6812280" y="2514600"/>
+          <p:cNvPr id="24" name="Shape 20"/>
+          <p:cNvSpPr/>
+          <p:nvPr/>
+        </p:nvSpPr>
+        <p:spPr>
+          <a:xfrm>
+            <a:off x="6812280" y="2532888"/>
             <a:ext cx="1691640" cy="457200"/>
           </a:xfrm>
           <a:prstGeom prst="roundRect">
@@ -6518,29 +6603,68 @@
       </p:sp>
       <p:sp>
         <p:nvSpPr>
-          <p:cNvPr id="22" name="Text 18"/>
-          <p:cNvSpPr/>
-          <p:nvPr/>
-        </p:nvSpPr>
-        <p:spPr>
-          <a:xfrm>
-            <a:off x="6812280" y="2514600"/>
-            <a:ext cx="1691640" cy="457200"/>
-          </a:xfrm>
-          <a:prstGeom prst="rect">
-            <a:avLst/>
-          </a:prstGeom>
-          <a:noFill/>
-          <a:ln/>
-        </p:spPr>
-        <p:txBody>
-          <a:bodyPr wrap="square" lIns="0" tIns="0" rIns="0" bIns="0" rtlCol="0" anchor="ctr"/>
+          <p:cNvPr id="25" name="Text 21"/>
+          <p:cNvSpPr/>
+          <p:nvPr/>
+        </p:nvSpPr>
+        <p:spPr>
+          <a:xfrm>
+            <a:off x="6885432" y="2532888"/>
+            <a:ext cx="1554480" cy="237744"/>
+          </a:xfrm>
+          <a:prstGeom prst="rect">
+            <a:avLst/>
+          </a:prstGeom>
+          <a:noFill/>
+          <a:ln/>
+        </p:spPr>
+        <p:txBody>
+          <a:bodyPr wrap="square" lIns="0" tIns="0" rIns="0" bIns="0" rtlCol="0" anchor="b"/>
           <a:lstStyle/>
           <a:p>
             <a:pPr algn="ctr" indent="0" marL="0">
               <a:buNone/>
             </a:pPr>
             <a:r>
+              <a:rPr lang="en-US" sz="1100" b="1" dirty="0">
+                <a:solidFill>
+                  <a:srgbClr val="028090"/>
+                </a:solidFill>
+                <a:latin typeface="Calibri" pitchFamily="34" charset="0"/>
+                <a:ea typeface="Calibri" pitchFamily="34" charset="-122"/>
+                <a:cs typeface="Calibri" pitchFamily="34" charset="-120"/>
+              </a:rPr>
+              <a:t>screenshot</a:t>
+            </a:r>
+            <a:endParaRPr lang="en-US" sz="1100" dirty="0"/>
+          </a:p>
+        </p:txBody>
+      </p:sp>
+      <p:sp>
+        <p:nvSpPr>
+          <p:cNvPr id="26" name="Text 22"/>
+          <p:cNvSpPr/>
+          <p:nvPr/>
+        </p:nvSpPr>
+        <p:spPr>
+          <a:xfrm>
+            <a:off x="6885432" y="2752344"/>
+            <a:ext cx="1554480" cy="201168"/>
+          </a:xfrm>
+          <a:prstGeom prst="rect">
+            <a:avLst/>
+          </a:prstGeom>
+          <a:noFill/>
+          <a:ln/>
+        </p:spPr>
+        <p:txBody>
+          <a:bodyPr wrap="square" lIns="0" tIns="0" rIns="0" bIns="0" rtlCol="0" anchor="t"/>
+          <a:lstStyle/>
+          <a:p>
+            <a:pPr algn="ctr" indent="0" marL="0">
+              <a:buNone/>
+            </a:pPr>
+            <a:r>
               <a:rPr lang="en-US" sz="1100" dirty="0">
                 <a:solidFill>
                   <a:srgbClr val="012A30"/>
@@ -6549,7 +6673,7 @@
                 <a:ea typeface="Calibri" pitchFamily="34" charset="-122"/>
                 <a:cs typeface="Calibri" pitchFamily="34" charset="-120"/>
               </a:rPr>
-              <a:t>screenshot  截图服务</a:t>
+              <a:t>截图服务</a:t>
             </a:r>
             <a:endParaRPr lang="en-US" sz="1100" dirty="0"/>
           </a:p>
@@ -6557,13 +6681,13 @@
       </p:sp>
       <p:sp>
         <p:nvSpPr>
-          <p:cNvPr id="23" name="Shape 19"/>
-          <p:cNvSpPr/>
-          <p:nvPr/>
-        </p:nvSpPr>
-        <p:spPr>
-          <a:xfrm>
-            <a:off x="4983480" y="3063240"/>
+          <p:cNvPr id="27" name="Shape 23"/>
+          <p:cNvSpPr/>
+          <p:nvPr/>
+        </p:nvSpPr>
+        <p:spPr>
+          <a:xfrm>
+            <a:off x="4983480" y="3099816"/>
             <a:ext cx="1691640" cy="457200"/>
           </a:xfrm>
           <a:prstGeom prst="roundRect">
@@ -6579,29 +6703,68 @@
       </p:sp>
       <p:sp>
         <p:nvSpPr>
-          <p:cNvPr id="24" name="Text 20"/>
-          <p:cNvSpPr/>
-          <p:nvPr/>
-        </p:nvSpPr>
-        <p:spPr>
-          <a:xfrm>
-            <a:off x="4983480" y="3063240"/>
-            <a:ext cx="1691640" cy="457200"/>
-          </a:xfrm>
-          <a:prstGeom prst="rect">
-            <a:avLst/>
-          </a:prstGeom>
-          <a:noFill/>
-          <a:ln/>
-        </p:spPr>
-        <p:txBody>
-          <a:bodyPr wrap="square" lIns="0" tIns="0" rIns="0" bIns="0" rtlCol="0" anchor="ctr"/>
+          <p:cNvPr id="28" name="Text 24"/>
+          <p:cNvSpPr/>
+          <p:nvPr/>
+        </p:nvSpPr>
+        <p:spPr>
+          <a:xfrm>
+            <a:off x="5056632" y="3099816"/>
+            <a:ext cx="1554480" cy="237744"/>
+          </a:xfrm>
+          <a:prstGeom prst="rect">
+            <a:avLst/>
+          </a:prstGeom>
+          <a:noFill/>
+          <a:ln/>
+        </p:spPr>
+        <p:txBody>
+          <a:bodyPr wrap="square" lIns="0" tIns="0" rIns="0" bIns="0" rtlCol="0" anchor="b"/>
           <a:lstStyle/>
           <a:p>
             <a:pPr algn="ctr" indent="0" marL="0">
               <a:buNone/>
             </a:pPr>
             <a:r>
+              <a:rPr lang="en-US" sz="1100" b="1" dirty="0">
+                <a:solidFill>
+                  <a:srgbClr val="028090"/>
+                </a:solidFill>
+                <a:latin typeface="Calibri" pitchFamily="34" charset="0"/>
+                <a:ea typeface="Calibri" pitchFamily="34" charset="-122"/>
+                <a:cs typeface="Calibri" pitchFamily="34" charset="-120"/>
+              </a:rPr>
+              <a:t>client</a:t>
+            </a:r>
+            <a:endParaRPr lang="en-US" sz="1100" dirty="0"/>
+          </a:p>
+        </p:txBody>
+      </p:sp>
+      <p:sp>
+        <p:nvSpPr>
+          <p:cNvPr id="29" name="Text 25"/>
+          <p:cNvSpPr/>
+          <p:nvPr/>
+        </p:nvSpPr>
+        <p:spPr>
+          <a:xfrm>
+            <a:off x="5056632" y="3319272"/>
+            <a:ext cx="1554480" cy="201168"/>
+          </a:xfrm>
+          <a:prstGeom prst="rect">
+            <a:avLst/>
+          </a:prstGeom>
+          <a:noFill/>
+          <a:ln/>
+        </p:spPr>
+        <p:txBody>
+          <a:bodyPr wrap="square" lIns="0" tIns="0" rIns="0" bIns="0" rtlCol="0" anchor="t"/>
+          <a:lstStyle/>
+          <a:p>
+            <a:pPr algn="ctr" indent="0" marL="0">
+              <a:buNone/>
+            </a:pPr>
+            <a:r>
               <a:rPr lang="en-US" sz="1100" dirty="0">
                 <a:solidFill>
                   <a:srgbClr val="012A30"/>
@@ -6610,7 +6773,7 @@
                 <a:ea typeface="Calibri" pitchFamily="34" charset="-122"/>
                 <a:cs typeface="Calibri" pitchFamily="34" charset="-120"/>
               </a:rPr>
-              <a:t>client  RPC 接口</a:t>
+              <a:t>RPC 接口</a:t>
             </a:r>
             <a:endParaRPr lang="en-US" sz="1100" dirty="0"/>
           </a:p>
@@ -6618,13 +6781,13 @@
       </p:sp>
       <p:sp>
         <p:nvSpPr>
-          <p:cNvPr id="25" name="Shape 21"/>
-          <p:cNvSpPr/>
-          <p:nvPr/>
-        </p:nvSpPr>
-        <p:spPr>
-          <a:xfrm>
-            <a:off x="6812280" y="3063240"/>
+          <p:cNvPr id="30" name="Shape 26"/>
+          <p:cNvSpPr/>
+          <p:nvPr/>
+        </p:nvSpPr>
+        <p:spPr>
+          <a:xfrm>
+            <a:off x="6812280" y="3099816"/>
             <a:ext cx="1691640" cy="457200"/>
           </a:xfrm>
           <a:prstGeom prst="roundRect">
@@ -6640,29 +6803,68 @@
       </p:sp>
       <p:sp>
         <p:nvSpPr>
-          <p:cNvPr id="26" name="Text 22"/>
-          <p:cNvSpPr/>
-          <p:nvPr/>
-        </p:nvSpPr>
-        <p:spPr>
-          <a:xfrm>
-            <a:off x="6812280" y="3063240"/>
-            <a:ext cx="1691640" cy="457200"/>
-          </a:xfrm>
-          <a:prstGeom prst="rect">
-            <a:avLst/>
-          </a:prstGeom>
-          <a:noFill/>
-          <a:ln/>
-        </p:spPr>
-        <p:txBody>
-          <a:bodyPr wrap="square" lIns="0" tIns="0" rIns="0" bIns="0" rtlCol="0" anchor="ctr"/>
+          <p:cNvPr id="31" name="Text 27"/>
+          <p:cNvSpPr/>
+          <p:nvPr/>
+        </p:nvSpPr>
+        <p:spPr>
+          <a:xfrm>
+            <a:off x="6885432" y="3099816"/>
+            <a:ext cx="1554480" cy="237744"/>
+          </a:xfrm>
+          <a:prstGeom prst="rect">
+            <a:avLst/>
+          </a:prstGeom>
+          <a:noFill/>
+          <a:ln/>
+        </p:spPr>
+        <p:txBody>
+          <a:bodyPr wrap="square" lIns="0" tIns="0" rIns="0" bIns="0" rtlCol="0" anchor="b"/>
           <a:lstStyle/>
           <a:p>
             <a:pPr algn="ctr" indent="0" marL="0">
               <a:buNone/>
             </a:pPr>
             <a:r>
+              <a:rPr lang="en-US" sz="1100" b="1" dirty="0">
+                <a:solidFill>
+                  <a:srgbClr val="028090"/>
+                </a:solidFill>
+                <a:latin typeface="Calibri" pitchFamily="34" charset="0"/>
+                <a:ea typeface="Calibri" pitchFamily="34" charset="-122"/>
+                <a:cs typeface="Calibri" pitchFamily="34" charset="-120"/>
+              </a:rPr>
+              <a:t>common</a:t>
+            </a:r>
+            <a:endParaRPr lang="en-US" sz="1100" dirty="0"/>
+          </a:p>
+        </p:txBody>
+      </p:sp>
+      <p:sp>
+        <p:nvSpPr>
+          <p:cNvPr id="32" name="Text 28"/>
+          <p:cNvSpPr/>
+          <p:nvPr/>
+        </p:nvSpPr>
+        <p:spPr>
+          <a:xfrm>
+            <a:off x="6885432" y="3319272"/>
+            <a:ext cx="1554480" cy="201168"/>
+          </a:xfrm>
+          <a:prstGeom prst="rect">
+            <a:avLst/>
+          </a:prstGeom>
+          <a:noFill/>
+          <a:ln/>
+        </p:spPr>
+        <p:txBody>
+          <a:bodyPr wrap="square" lIns="0" tIns="0" rIns="0" bIns="0" rtlCol="0" anchor="t"/>
+          <a:lstStyle/>
+          <a:p>
+            <a:pPr algn="ctr" indent="0" marL="0">
+              <a:buNone/>
+            </a:pPr>
+            <a:r>
               <a:rPr lang="en-US" sz="1100" dirty="0">
                 <a:solidFill>
                   <a:srgbClr val="012A30"/>
@@ -6671,7 +6873,7 @@
                 <a:ea typeface="Calibri" pitchFamily="34" charset="-122"/>
                 <a:cs typeface="Calibri" pitchFamily="34" charset="-120"/>
               </a:rPr>
-              <a:t>common  通用能力</a:t>
+              <a:t>通用能力</a:t>
             </a:r>
             <a:endParaRPr lang="en-US" sz="1100" dirty="0"/>
           </a:p>
@@ -6679,13 +6881,13 @@
       </p:sp>
       <p:sp>
         <p:nvSpPr>
-          <p:cNvPr id="27" name="Shape 23"/>
-          <p:cNvSpPr/>
-          <p:nvPr/>
-        </p:nvSpPr>
-        <p:spPr>
-          <a:xfrm>
-            <a:off x="4983480" y="3611880"/>
+          <p:cNvPr id="33" name="Shape 29"/>
+          <p:cNvSpPr/>
+          <p:nvPr/>
+        </p:nvSpPr>
+        <p:spPr>
+          <a:xfrm>
+            <a:off x="4983480" y="3666744"/>
             <a:ext cx="1691640" cy="457200"/>
           </a:xfrm>
           <a:prstGeom prst="roundRect">
@@ -6701,29 +6903,68 @@
       </p:sp>
       <p:sp>
         <p:nvSpPr>
-          <p:cNvPr id="28" name="Text 24"/>
-          <p:cNvSpPr/>
-          <p:nvPr/>
-        </p:nvSpPr>
-        <p:spPr>
-          <a:xfrm>
-            <a:off x="4983480" y="3611880"/>
-            <a:ext cx="1691640" cy="457200"/>
-          </a:xfrm>
-          <a:prstGeom prst="rect">
-            <a:avLst/>
-          </a:prstGeom>
-          <a:noFill/>
-          <a:ln/>
-        </p:spPr>
-        <p:txBody>
-          <a:bodyPr wrap="square" lIns="0" tIns="0" rIns="0" bIns="0" rtlCol="0" anchor="ctr"/>
+          <p:cNvPr id="34" name="Text 30"/>
+          <p:cNvSpPr/>
+          <p:nvPr/>
+        </p:nvSpPr>
+        <p:spPr>
+          <a:xfrm>
+            <a:off x="5056632" y="3666744"/>
+            <a:ext cx="1554480" cy="237744"/>
+          </a:xfrm>
+          <a:prstGeom prst="rect">
+            <a:avLst/>
+          </a:prstGeom>
+          <a:noFill/>
+          <a:ln/>
+        </p:spPr>
+        <p:txBody>
+          <a:bodyPr wrap="square" lIns="0" tIns="0" rIns="0" bIns="0" rtlCol="0" anchor="b"/>
           <a:lstStyle/>
           <a:p>
             <a:pPr algn="ctr" indent="0" marL="0">
               <a:buNone/>
             </a:pPr>
             <a:r>
+              <a:rPr lang="en-US" sz="1100" b="1" dirty="0">
+                <a:solidFill>
+                  <a:srgbClr val="028090"/>
+                </a:solidFill>
+                <a:latin typeface="Calibri" pitchFamily="34" charset="0"/>
+                <a:ea typeface="Calibri" pitchFamily="34" charset="-122"/>
+                <a:cs typeface="Calibri" pitchFamily="34" charset="-120"/>
+              </a:rPr>
+              <a:t>model</a:t>
+            </a:r>
+            <a:endParaRPr lang="en-US" sz="1100" dirty="0"/>
+          </a:p>
+        </p:txBody>
+      </p:sp>
+      <p:sp>
+        <p:nvSpPr>
+          <p:cNvPr id="35" name="Text 31"/>
+          <p:cNvSpPr/>
+          <p:nvPr/>
+        </p:nvSpPr>
+        <p:spPr>
+          <a:xfrm>
+            <a:off x="5056632" y="3886200"/>
+            <a:ext cx="1554480" cy="201168"/>
+          </a:xfrm>
+          <a:prstGeom prst="rect">
+            <a:avLst/>
+          </a:prstGeom>
+          <a:noFill/>
+          <a:ln/>
+        </p:spPr>
+        <p:txBody>
+          <a:bodyPr wrap="square" lIns="0" tIns="0" rIns="0" bIns="0" rtlCol="0" anchor="t"/>
+          <a:lstStyle/>
+          <a:p>
+            <a:pPr algn="ctr" indent="0" marL="0">
+              <a:buNone/>
+            </a:pPr>
+            <a:r>
               <a:rPr lang="en-US" sz="1100" dirty="0">
                 <a:solidFill>
                   <a:srgbClr val="012A30"/>
@@ -6732,7 +6973,7 @@
                 <a:ea typeface="Calibri" pitchFamily="34" charset="-122"/>
                 <a:cs typeface="Calibri" pitchFamily="34" charset="-120"/>
               </a:rPr>
-              <a:t>model  数据模型</a:t>
+              <a:t>数据模型</a:t>
             </a:r>
             <a:endParaRPr lang="en-US" sz="1100" dirty="0"/>
           </a:p>
@@ -6740,14 +6981,14 @@
       </p:sp>
       <p:sp>
         <p:nvSpPr>
-          <p:cNvPr id="29" name="Shape 25"/>
-          <p:cNvSpPr/>
-          <p:nvPr/>
-        </p:nvSpPr>
-        <p:spPr>
-          <a:xfrm>
-            <a:off x="0" y="4800600"/>
-            <a:ext cx="9144000" cy="342900"/>
+          <p:cNvPr id="36" name="Shape 32"/>
+          <p:cNvSpPr/>
+          <p:nvPr/>
+        </p:nvSpPr>
+        <p:spPr>
+          <a:xfrm>
+            <a:off x="0" y="4828032"/>
+            <a:ext cx="9144000" cy="315468"/>
           </a:xfrm>
           <a:prstGeom prst="rect">
             <a:avLst/>
@@ -6765,13 +7006,13 @@
       </p:sp>
       <p:sp>
         <p:nvSpPr>
-          <p:cNvPr id="30" name="Text 26"/>
-          <p:cNvSpPr/>
-          <p:nvPr/>
-        </p:nvSpPr>
-        <p:spPr>
-          <a:xfrm>
-            <a:off x="457200" y="4828032"/>
+          <p:cNvPr id="37" name="Text 33"/>
+          <p:cNvSpPr/>
+          <p:nvPr/>
+        </p:nvSpPr>
+        <p:spPr>
+          <a:xfrm>
+            <a:off x="457200" y="4846320"/>
             <a:ext cx="5943600" cy="274320"/>
           </a:xfrm>
           <a:prstGeom prst="rect">
@@ -6790,7 +7031,7 @@
             <a:r>
               <a:rPr lang="en-US" sz="1100" dirty="0">
                 <a:solidFill>
-                  <a:srgbClr val="5A6F72"/>
+                  <a:srgbClr val="023C42"/>
                 </a:solidFill>
                 <a:latin typeface="Calibri" pitchFamily="34" charset="0"/>
                 <a:ea typeface="Calibri" pitchFamily="34" charset="-122"/>
@@ -6804,13 +7045,13 @@
       </p:sp>
       <p:sp>
         <p:nvSpPr>
-          <p:cNvPr id="31" name="Text 27"/>
-          <p:cNvSpPr/>
-          <p:nvPr/>
-        </p:nvSpPr>
-        <p:spPr>
-          <a:xfrm>
-            <a:off x="7498080" y="4828032"/>
+          <p:cNvPr id="38" name="Text 34"/>
+          <p:cNvSpPr/>
+          <p:nvPr/>
+        </p:nvSpPr>
+        <p:spPr>
+          <a:xfrm>
+            <a:off x="7498080" y="4846320"/>
             <a:ext cx="1188720" cy="274320"/>
           </a:xfrm>
           <a:prstGeom prst="rect">
@@ -6829,7 +7070,7 @@
             <a:r>
               <a:rPr lang="en-US" sz="1100" dirty="0">
                 <a:solidFill>
-                  <a:srgbClr val="5A6F72"/>
+                  <a:srgbClr val="023C42"/>
                 </a:solidFill>
                 <a:latin typeface="Calibri" pitchFamily="34" charset="0"/>
                 <a:ea typeface="Calibri" pitchFamily="34" charset="-122"/>
@@ -6919,8 +7160,8 @@
         </p:nvSpPr>
         <p:spPr>
           <a:xfrm>
-            <a:off x="457200" y="256032"/>
-            <a:ext cx="8229600" cy="502920"/>
+            <a:off x="457200" y="292608"/>
+            <a:ext cx="8229600" cy="457200"/>
           </a:xfrm>
           <a:prstGeom prst="rect">
             <a:avLst/>
@@ -6936,7 +7177,7 @@
               <a:buNone/>
             </a:pPr>
             <a:r>
-              <a:rPr lang="en-US" sz="3600" b="1" dirty="0">
+              <a:rPr lang="en-US" sz="3400" b="1" dirty="0">
                 <a:solidFill>
                   <a:srgbClr val="012A30"/>
                 </a:solidFill>
@@ -6946,7 +7187,7 @@
               </a:rPr>
               <a:t>数据 / 指标要点</a:t>
             </a:r>
-            <a:endParaRPr lang="en-US" sz="3600" dirty="0"/>
+            <a:endParaRPr lang="en-US" sz="3400" dirty="0"/>
           </a:p>
         </p:txBody>
       </p:sp>
@@ -6958,7 +7199,7 @@
         </p:nvSpPr>
         <p:spPr>
           <a:xfrm>
-            <a:off x="457200" y="822960"/>
+            <a:off x="457200" y="804672"/>
             <a:ext cx="8229600" cy="274320"/>
           </a:xfrm>
           <a:prstGeom prst="rect">
@@ -6977,7 +7218,7 @@
             <a:r>
               <a:rPr lang="en-US" sz="1400" i="1" dirty="0">
                 <a:solidFill>
-                  <a:srgbClr val="5A6F72"/>
+                  <a:srgbClr val="3D5558"/>
                 </a:solidFill>
                 <a:latin typeface="Calibri" pitchFamily="34" charset="0"/>
                 <a:ea typeface="Calibri" pitchFamily="34" charset="-122"/>
@@ -6997,12 +7238,12 @@
         </p:nvSpPr>
         <p:spPr>
           <a:xfrm>
-            <a:off x="457200" y="1280160"/>
-            <a:ext cx="2011680" cy="1965960"/>
+            <a:off x="457200" y="1234440"/>
+            <a:ext cx="2011680" cy="1828800"/>
           </a:xfrm>
           <a:prstGeom prst="roundRect">
             <a:avLst>
-              <a:gd name="adj" fmla="val 4651"/>
+              <a:gd name="adj" fmla="val 5000"/>
             </a:avLst>
           </a:prstGeom>
           <a:solidFill>
@@ -7026,8 +7267,8 @@
         </p:nvSpPr>
         <p:spPr>
           <a:xfrm>
-            <a:off x="457200" y="1417320"/>
-            <a:ext cx="2011680" cy="731520"/>
+            <a:off x="457200" y="1371600"/>
+            <a:ext cx="2011680" cy="640080"/>
           </a:xfrm>
           <a:prstGeom prst="rect">
             <a:avLst/>
@@ -7065,7 +7306,7 @@
         </p:nvSpPr>
         <p:spPr>
           <a:xfrm>
-            <a:off x="548640" y="2194560"/>
+            <a:off x="548640" y="2057400"/>
             <a:ext cx="1828800" cy="365760"/>
           </a:xfrm>
           <a:prstGeom prst="rect">
@@ -7082,7 +7323,7 @@
               <a:buNone/>
             </a:pPr>
             <a:r>
-              <a:rPr lang="en-US" sz="1400" b="1" dirty="0">
+              <a:rPr lang="en-US" sz="1300" b="1" dirty="0">
                 <a:solidFill>
                   <a:srgbClr val="012A30"/>
                 </a:solidFill>
@@ -7092,7 +7333,7 @@
               </a:rPr>
               <a:t>单元/集成测试类</a:t>
             </a:r>
-            <a:endParaRPr lang="en-US" sz="1400" dirty="0"/>
+            <a:endParaRPr lang="en-US" sz="1300" dirty="0"/>
           </a:p>
         </p:txBody>
       </p:sp>
@@ -7104,7 +7345,7 @@
         </p:nvSpPr>
         <p:spPr>
           <a:xfrm>
-            <a:off x="548640" y="2606040"/>
+            <a:off x="548640" y="2468880"/>
             <a:ext cx="1828800" cy="365760"/>
           </a:xfrm>
           <a:prstGeom prst="rect">
@@ -7123,7 +7364,7 @@
             <a:r>
               <a:rPr lang="en-US" sz="1200" dirty="0">
                 <a:solidFill>
-                  <a:srgbClr val="5A6F72"/>
+                  <a:srgbClr val="3D5558"/>
                 </a:solidFill>
                 <a:latin typeface="Calibri" pitchFamily="34" charset="0"/>
                 <a:ea typeface="Calibri" pitchFamily="34" charset="-122"/>
@@ -7143,12 +7384,12 @@
         </p:nvSpPr>
         <p:spPr>
           <a:xfrm>
-            <a:off x="2606040" y="1280160"/>
-            <a:ext cx="2011680" cy="1965960"/>
+            <a:off x="2651760" y="1234440"/>
+            <a:ext cx="2011680" cy="1828800"/>
           </a:xfrm>
           <a:prstGeom prst="roundRect">
             <a:avLst>
-              <a:gd name="adj" fmla="val 4651"/>
+              <a:gd name="adj" fmla="val 5000"/>
             </a:avLst>
           </a:prstGeom>
           <a:solidFill>
@@ -7172,8 +7413,8 @@
         </p:nvSpPr>
         <p:spPr>
           <a:xfrm>
-            <a:off x="2606040" y="1417320"/>
-            <a:ext cx="2011680" cy="731520"/>
+            <a:off x="2651760" y="1371600"/>
+            <a:ext cx="2011680" cy="640080"/>
           </a:xfrm>
           <a:prstGeom prst="rect">
             <a:avLst/>
@@ -7211,7 +7452,7 @@
         </p:nvSpPr>
         <p:spPr>
           <a:xfrm>
-            <a:off x="2697480" y="2194560"/>
+            <a:off x="2743200" y="2057400"/>
             <a:ext cx="1828800" cy="365760"/>
           </a:xfrm>
           <a:prstGeom prst="rect">
@@ -7228,7 +7469,7 @@
               <a:buNone/>
             </a:pPr>
             <a:r>
-              <a:rPr lang="en-US" sz="1400" b="1" dirty="0">
+              <a:rPr lang="en-US" sz="1300" b="1" dirty="0">
                 <a:solidFill>
                   <a:srgbClr val="012A30"/>
                 </a:solidFill>
@@ -7238,7 +7479,7 @@
               </a:rPr>
               <a:t>微服务模块</a:t>
             </a:r>
-            <a:endParaRPr lang="en-US" sz="1400" dirty="0"/>
+            <a:endParaRPr lang="en-US" sz="1300" dirty="0"/>
           </a:p>
         </p:txBody>
       </p:sp>
@@ -7250,7 +7491,7 @@
         </p:nvSpPr>
         <p:spPr>
           <a:xfrm>
-            <a:off x="2697480" y="2606040"/>
+            <a:off x="2743200" y="2468880"/>
             <a:ext cx="1828800" cy="365760"/>
           </a:xfrm>
           <a:prstGeom prst="rect">
@@ -7269,7 +7510,7 @@
             <a:r>
               <a:rPr lang="en-US" sz="1200" dirty="0">
                 <a:solidFill>
-                  <a:srgbClr val="5A6F72"/>
+                  <a:srgbClr val="3D5558"/>
                 </a:solidFill>
                 <a:latin typeface="Calibri" pitchFamily="34" charset="0"/>
                 <a:ea typeface="Calibri" pitchFamily="34" charset="-122"/>
@@ -7289,12 +7530,12 @@
         </p:nvSpPr>
         <p:spPr>
           <a:xfrm>
-            <a:off x="4754880" y="1280160"/>
-            <a:ext cx="2011680" cy="1965960"/>
+            <a:off x="4846320" y="1234440"/>
+            <a:ext cx="2011680" cy="1828800"/>
           </a:xfrm>
           <a:prstGeom prst="roundRect">
             <a:avLst>
-              <a:gd name="adj" fmla="val 4651"/>
+              <a:gd name="adj" fmla="val 5000"/>
             </a:avLst>
           </a:prstGeom>
           <a:solidFill>
@@ -7318,8 +7559,8 @@
         </p:nvSpPr>
         <p:spPr>
           <a:xfrm>
-            <a:off x="4754880" y="1417320"/>
-            <a:ext cx="2011680" cy="731520"/>
+            <a:off x="4846320" y="1371600"/>
+            <a:ext cx="2011680" cy="640080"/>
           </a:xfrm>
           <a:prstGeom prst="rect">
             <a:avLst/>
@@ -7357,7 +7598,7 @@
         </p:nvSpPr>
         <p:spPr>
           <a:xfrm>
-            <a:off x="4846320" y="2194560"/>
+            <a:off x="4937760" y="2057400"/>
             <a:ext cx="1828800" cy="365760"/>
           </a:xfrm>
           <a:prstGeom prst="rect">
@@ -7374,7 +7615,7 @@
               <a:buNone/>
             </a:pPr>
             <a:r>
-              <a:rPr lang="en-US" sz="1400" b="1" dirty="0">
+              <a:rPr lang="en-US" sz="1300" b="1" dirty="0">
                 <a:solidFill>
                   <a:srgbClr val="012A30"/>
                 </a:solidFill>
@@ -7384,7 +7625,7 @@
               </a:rPr>
               <a:t>开放 Issues</a:t>
             </a:r>
-            <a:endParaRPr lang="en-US" sz="1400" dirty="0"/>
+            <a:endParaRPr lang="en-US" sz="1300" dirty="0"/>
           </a:p>
         </p:txBody>
       </p:sp>
@@ -7396,7 +7637,7 @@
         </p:nvSpPr>
         <p:spPr>
           <a:xfrm>
-            <a:off x="4846320" y="2606040"/>
+            <a:off x="4937760" y="2468880"/>
             <a:ext cx="1828800" cy="365760"/>
           </a:xfrm>
           <a:prstGeom prst="rect">
@@ -7415,7 +7656,7 @@
             <a:r>
               <a:rPr lang="en-US" sz="1200" dirty="0">
                 <a:solidFill>
-                  <a:srgbClr val="5A6F72"/>
+                  <a:srgbClr val="3D5558"/>
                 </a:solidFill>
                 <a:latin typeface="Calibri" pitchFamily="34" charset="0"/>
                 <a:ea typeface="Calibri" pitchFamily="34" charset="-122"/>
@@ -7435,12 +7676,12 @@
         </p:nvSpPr>
         <p:spPr>
           <a:xfrm>
-            <a:off x="6903720" y="1280160"/>
-            <a:ext cx="2011680" cy="1965960"/>
+            <a:off x="7040880" y="1234440"/>
+            <a:ext cx="2011680" cy="1828800"/>
           </a:xfrm>
           <a:prstGeom prst="roundRect">
             <a:avLst>
-              <a:gd name="adj" fmla="val 4651"/>
+              <a:gd name="adj" fmla="val 5000"/>
             </a:avLst>
           </a:prstGeom>
           <a:solidFill>
@@ -7464,8 +7705,8 @@
         </p:nvSpPr>
         <p:spPr>
           <a:xfrm>
-            <a:off x="6903720" y="1417320"/>
-            <a:ext cx="2011680" cy="731520"/>
+            <a:off x="7040880" y="1371600"/>
+            <a:ext cx="2011680" cy="640080"/>
           </a:xfrm>
           <a:prstGeom prst="rect">
             <a:avLst/>
@@ -7481,7 +7722,7 @@
               <a:buNone/>
             </a:pPr>
             <a:r>
-              <a:rPr lang="en-US" sz="4000" b="1" dirty="0">
+              <a:rPr lang="en-US" sz="2600" b="1" dirty="0">
                 <a:solidFill>
                   <a:srgbClr val="028090"/>
                 </a:solidFill>
@@ -7489,9 +7730,9 @@
                 <a:ea typeface="Georgia" pitchFamily="34" charset="-122"/>
                 <a:cs typeface="Georgia" pitchFamily="34" charset="-120"/>
               </a:rPr>
-              <a:t>—</a:t>
-            </a:r>
-            <a:endParaRPr lang="en-US" sz="4000" dirty="0"/>
+              <a:t>待接入</a:t>
+            </a:r>
+            <a:endParaRPr lang="en-US" sz="2600" dirty="0"/>
           </a:p>
         </p:txBody>
       </p:sp>
@@ -7503,7 +7744,7 @@
         </p:nvSpPr>
         <p:spPr>
           <a:xfrm>
-            <a:off x="6995160" y="2194560"/>
+            <a:off x="7132320" y="2057400"/>
             <a:ext cx="1828800" cy="365760"/>
           </a:xfrm>
           <a:prstGeom prst="rect">
@@ -7520,7 +7761,7 @@
               <a:buNone/>
             </a:pPr>
             <a:r>
-              <a:rPr lang="en-US" sz="1400" b="1" dirty="0">
+              <a:rPr lang="en-US" sz="1300" b="1" dirty="0">
                 <a:solidFill>
                   <a:srgbClr val="012A30"/>
                 </a:solidFill>
@@ -7530,7 +7771,7 @@
               </a:rPr>
               <a:t>生产调用量</a:t>
             </a:r>
-            <a:endParaRPr lang="en-US" sz="1400" dirty="0"/>
+            <a:endParaRPr lang="en-US" sz="1300" dirty="0"/>
           </a:p>
         </p:txBody>
       </p:sp>
@@ -7542,7 +7783,7 @@
         </p:nvSpPr>
         <p:spPr>
           <a:xfrm>
-            <a:off x="6995160" y="2606040"/>
+            <a:off x="7132320" y="2468880"/>
             <a:ext cx="1828800" cy="365760"/>
           </a:xfrm>
           <a:prstGeom prst="rect">
@@ -7561,7 +7802,7 @@
             <a:r>
               <a:rPr lang="en-US" sz="1200" dirty="0">
                 <a:solidFill>
-                  <a:srgbClr val="5A6F72"/>
+                  <a:srgbClr val="3D5558"/>
                 </a:solidFill>
                 <a:latin typeface="Calibri" pitchFamily="34" charset="0"/>
                 <a:ea typeface="Calibri" pitchFamily="34" charset="-122"/>
@@ -7581,12 +7822,12 @@
         </p:nvSpPr>
         <p:spPr>
           <a:xfrm>
-            <a:off x="457200" y="3474720"/>
-            <a:ext cx="8229600" cy="960120"/>
+            <a:off x="457200" y="3291840"/>
+            <a:ext cx="8229600" cy="1143000"/>
           </a:xfrm>
           <a:prstGeom prst="roundRect">
             <a:avLst>
-              <a:gd name="adj" fmla="val 9524"/>
+              <a:gd name="adj" fmla="val 8000"/>
             </a:avLst>
           </a:prstGeom>
           <a:solidFill>
@@ -7611,7 +7852,7 @@
         </p:blipFill>
         <p:spPr>
           <a:xfrm>
-            <a:off x="685800" y="3703320"/>
+            <a:off x="731520" y="3566160"/>
             <a:ext cx="365760" cy="365760"/>
           </a:xfrm>
           <a:prstGeom prst="rect">
@@ -7627,7 +7868,7 @@
         </p:nvSpPr>
         <p:spPr>
           <a:xfrm>
-            <a:off x="1234440" y="3566160"/>
+            <a:off x="1280160" y="3429000"/>
             <a:ext cx="7132320" cy="320040"/>
           </a:xfrm>
           <a:prstGeom prst="rect">
@@ -7666,8 +7907,8 @@
         </p:nvSpPr>
         <p:spPr>
           <a:xfrm>
-            <a:off x="1234440" y="3886200"/>
-            <a:ext cx="7223760" cy="411480"/>
+            <a:off x="1280160" y="3794760"/>
+            <a:ext cx="7132320" cy="457200"/>
           </a:xfrm>
           <a:prstGeom prst="rect">
             <a:avLst/>
@@ -7705,8 +7946,8 @@
         </p:nvSpPr>
         <p:spPr>
           <a:xfrm>
-            <a:off x="0" y="4800600"/>
-            <a:ext cx="9144000" cy="342900"/>
+            <a:off x="0" y="4828032"/>
+            <a:ext cx="9144000" cy="315468"/>
           </a:xfrm>
           <a:prstGeom prst="rect">
             <a:avLst/>
@@ -7730,7 +7971,7 @@
         </p:nvSpPr>
         <p:spPr>
           <a:xfrm>
-            <a:off x="457200" y="4828032"/>
+            <a:off x="457200" y="4846320"/>
             <a:ext cx="5943600" cy="274320"/>
           </a:xfrm>
           <a:prstGeom prst="rect">
@@ -7749,7 +7990,7 @@
             <a:r>
               <a:rPr lang="en-US" sz="1100" dirty="0">
                 <a:solidFill>
-                  <a:srgbClr val="5A6F72"/>
+                  <a:srgbClr val="023C42"/>
                 </a:solidFill>
                 <a:latin typeface="Calibri" pitchFamily="34" charset="0"/>
                 <a:ea typeface="Calibri" pitchFamily="34" charset="-122"/>
@@ -7769,7 +8010,7 @@
         </p:nvSpPr>
         <p:spPr>
           <a:xfrm>
-            <a:off x="7498080" y="4828032"/>
+            <a:off x="7498080" y="4846320"/>
             <a:ext cx="1188720" cy="274320"/>
           </a:xfrm>
           <a:prstGeom prst="rect">
@@ -7788,7 +8029,7 @@
             <a:r>
               <a:rPr lang="en-US" sz="1100" dirty="0">
                 <a:solidFill>
-                  <a:srgbClr val="5A6F72"/>
+                  <a:srgbClr val="023C42"/>
                 </a:solidFill>
                 <a:latin typeface="Calibri" pitchFamily="34" charset="0"/>
                 <a:ea typeface="Calibri" pitchFamily="34" charset="-122"/>
@@ -7878,8 +8119,8 @@
         </p:nvSpPr>
         <p:spPr>
           <a:xfrm>
-            <a:off x="457200" y="256032"/>
-            <a:ext cx="8229600" cy="502920"/>
+            <a:off x="457200" y="292608"/>
+            <a:ext cx="8229600" cy="457200"/>
           </a:xfrm>
           <a:prstGeom prst="rect">
             <a:avLst/>
@@ -7895,7 +8136,7 @@
               <a:buNone/>
             </a:pPr>
             <a:r>
-              <a:rPr lang="en-US" sz="3600" b="1" dirty="0">
+              <a:rPr lang="en-US" sz="3400" b="1" dirty="0">
                 <a:solidFill>
                   <a:srgbClr val="012A30"/>
                 </a:solidFill>
@@ -7905,7 +8146,7 @@
               </a:rPr>
               <a:t>风险与问题</a:t>
             </a:r>
-            <a:endParaRPr lang="en-US" sz="3600" dirty="0"/>
+            <a:endParaRPr lang="en-US" sz="3400" dirty="0"/>
           </a:p>
         </p:txBody>
       </p:sp>
@@ -7917,7 +8158,7 @@
         </p:nvSpPr>
         <p:spPr>
           <a:xfrm>
-            <a:off x="457200" y="822960"/>
+            <a:off x="457200" y="804672"/>
             <a:ext cx="8229600" cy="274320"/>
           </a:xfrm>
           <a:prstGeom prst="rect">
@@ -7936,7 +8177,7 @@
             <a:r>
               <a:rPr lang="en-US" sz="1400" i="1" dirty="0">
                 <a:solidFill>
-                  <a:srgbClr val="5A6F72"/>
+                  <a:srgbClr val="3D5558"/>
                 </a:solidFill>
                 <a:latin typeface="Calibri" pitchFamily="34" charset="0"/>
                 <a:ea typeface="Calibri" pitchFamily="34" charset="-122"/>
@@ -7957,11 +8198,11 @@
         <p:spPr>
           <a:xfrm>
             <a:off x="457200" y="1188720"/>
-            <a:ext cx="8229600" cy="731520"/>
+            <a:ext cx="8229600" cy="749808"/>
           </a:xfrm>
           <a:prstGeom prst="roundRect">
             <a:avLst>
-              <a:gd name="adj" fmla="val 10000"/>
+              <a:gd name="adj" fmla="val 9756"/>
             </a:avLst>
           </a:prstGeom>
           <a:solidFill>
@@ -7986,11 +8227,11 @@
         <p:spPr>
           <a:xfrm>
             <a:off x="640080" y="1353312"/>
-            <a:ext cx="502920" cy="402336"/>
+            <a:ext cx="502920" cy="420624"/>
           </a:xfrm>
           <a:prstGeom prst="roundRect">
             <a:avLst>
-              <a:gd name="adj" fmla="val 13636"/>
+              <a:gd name="adj" fmla="val 13043"/>
             </a:avLst>
           </a:prstGeom>
           <a:solidFill>
@@ -8008,7 +8249,7 @@
         <p:spPr>
           <a:xfrm>
             <a:off x="640080" y="1353312"/>
-            <a:ext cx="502920" cy="402336"/>
+            <a:ext cx="502920" cy="420624"/>
           </a:xfrm>
           <a:prstGeom prst="rect">
             <a:avLst/>
@@ -8046,8 +8287,8 @@
         </p:nvSpPr>
         <p:spPr>
           <a:xfrm>
-            <a:off x="1325880" y="1280160"/>
-            <a:ext cx="7132320" cy="292608"/>
+            <a:off x="1371600" y="1280160"/>
+            <a:ext cx="7040880" cy="292608"/>
           </a:xfrm>
           <a:prstGeom prst="rect">
             <a:avLst/>
@@ -8085,8 +8326,8 @@
         </p:nvSpPr>
         <p:spPr>
           <a:xfrm>
-            <a:off x="1325880" y="1572768"/>
-            <a:ext cx="7132320" cy="274320"/>
+            <a:off x="1371600" y="1572768"/>
+            <a:ext cx="7040880" cy="274320"/>
           </a:xfrm>
           <a:prstGeom prst="rect">
             <a:avLst/>
@@ -8124,12 +8365,12 @@
         </p:nvSpPr>
         <p:spPr>
           <a:xfrm>
-            <a:off x="457200" y="2011680"/>
-            <a:ext cx="8229600" cy="731520"/>
+            <a:off x="457200" y="2057400"/>
+            <a:ext cx="8229600" cy="749808"/>
           </a:xfrm>
           <a:prstGeom prst="roundRect">
             <a:avLst>
-              <a:gd name="adj" fmla="val 10000"/>
+              <a:gd name="adj" fmla="val 9756"/>
             </a:avLst>
           </a:prstGeom>
           <a:solidFill>
@@ -8153,12 +8394,12 @@
         </p:nvSpPr>
         <p:spPr>
           <a:xfrm>
-            <a:off x="640080" y="2176272"/>
-            <a:ext cx="502920" cy="402336"/>
+            <a:off x="640080" y="2221992"/>
+            <a:ext cx="502920" cy="420624"/>
           </a:xfrm>
           <a:prstGeom prst="roundRect">
             <a:avLst>
-              <a:gd name="adj" fmla="val 13636"/>
+              <a:gd name="adj" fmla="val 13043"/>
             </a:avLst>
           </a:prstGeom>
           <a:solidFill>
@@ -8175,8 +8416,8 @@
         </p:nvSpPr>
         <p:spPr>
           <a:xfrm>
-            <a:off x="640080" y="2176272"/>
-            <a:ext cx="502920" cy="402336"/>
+            <a:off x="640080" y="2221992"/>
+            <a:ext cx="502920" cy="420624"/>
           </a:xfrm>
           <a:prstGeom prst="rect">
             <a:avLst/>
@@ -8214,8 +8455,8 @@
         </p:nvSpPr>
         <p:spPr>
           <a:xfrm>
-            <a:off x="1325880" y="2103120"/>
-            <a:ext cx="7132320" cy="292608"/>
+            <a:off x="1371600" y="2148840"/>
+            <a:ext cx="7040880" cy="292608"/>
           </a:xfrm>
           <a:prstGeom prst="rect">
             <a:avLst/>
@@ -8253,8 +8494,8 @@
         </p:nvSpPr>
         <p:spPr>
           <a:xfrm>
-            <a:off x="1325880" y="2395728"/>
-            <a:ext cx="7132320" cy="274320"/>
+            <a:off x="1371600" y="2441448"/>
+            <a:ext cx="7040880" cy="274320"/>
           </a:xfrm>
           <a:prstGeom prst="rect">
             <a:avLst/>
@@ -8292,12 +8533,12 @@
         </p:nvSpPr>
         <p:spPr>
           <a:xfrm>
-            <a:off x="457200" y="2834640"/>
-            <a:ext cx="8229600" cy="731520"/>
+            <a:off x="457200" y="2926080"/>
+            <a:ext cx="8229600" cy="749808"/>
           </a:xfrm>
           <a:prstGeom prst="roundRect">
             <a:avLst>
-              <a:gd name="adj" fmla="val 10000"/>
+              <a:gd name="adj" fmla="val 9756"/>
             </a:avLst>
           </a:prstGeom>
           <a:solidFill>
@@ -8321,12 +8562,12 @@
         </p:nvSpPr>
         <p:spPr>
           <a:xfrm>
-            <a:off x="640080" y="2999232"/>
-            <a:ext cx="502920" cy="402336"/>
+            <a:off x="640080" y="3090672"/>
+            <a:ext cx="502920" cy="420624"/>
           </a:xfrm>
           <a:prstGeom prst="roundRect">
             <a:avLst>
-              <a:gd name="adj" fmla="val 13636"/>
+              <a:gd name="adj" fmla="val 13043"/>
             </a:avLst>
           </a:prstGeom>
           <a:solidFill>
@@ -8343,8 +8584,8 @@
         </p:nvSpPr>
         <p:spPr>
           <a:xfrm>
-            <a:off x="640080" y="2999232"/>
-            <a:ext cx="502920" cy="402336"/>
+            <a:off x="640080" y="3090672"/>
+            <a:ext cx="502920" cy="420624"/>
           </a:xfrm>
           <a:prstGeom prst="rect">
             <a:avLst/>
@@ -8382,8 +8623,8 @@
         </p:nvSpPr>
         <p:spPr>
           <a:xfrm>
-            <a:off x="1325880" y="2926080"/>
-            <a:ext cx="7132320" cy="292608"/>
+            <a:off x="1371600" y="3017520"/>
+            <a:ext cx="7040880" cy="292608"/>
           </a:xfrm>
           <a:prstGeom prst="rect">
             <a:avLst/>
@@ -8421,8 +8662,8 @@
         </p:nvSpPr>
         <p:spPr>
           <a:xfrm>
-            <a:off x="1325880" y="3218688"/>
-            <a:ext cx="7132320" cy="274320"/>
+            <a:off x="1371600" y="3310128"/>
+            <a:ext cx="7040880" cy="274320"/>
           </a:xfrm>
           <a:prstGeom prst="rect">
             <a:avLst/>
@@ -8460,12 +8701,12 @@
         </p:nvSpPr>
         <p:spPr>
           <a:xfrm>
-            <a:off x="457200" y="3657600"/>
-            <a:ext cx="8229600" cy="731520"/>
+            <a:off x="457200" y="3794760"/>
+            <a:ext cx="8229600" cy="749808"/>
           </a:xfrm>
           <a:prstGeom prst="roundRect">
             <a:avLst>
-              <a:gd name="adj" fmla="val 10000"/>
+              <a:gd name="adj" fmla="val 9756"/>
             </a:avLst>
           </a:prstGeom>
           <a:solidFill>
@@ -8489,12 +8730,12 @@
         </p:nvSpPr>
         <p:spPr>
           <a:xfrm>
-            <a:off x="640080" y="3822192"/>
-            <a:ext cx="502920" cy="402336"/>
+            <a:off x="640080" y="3959352"/>
+            <a:ext cx="502920" cy="420624"/>
           </a:xfrm>
           <a:prstGeom prst="roundRect">
             <a:avLst>
-              <a:gd name="adj" fmla="val 13636"/>
+              <a:gd name="adj" fmla="val 13043"/>
             </a:avLst>
           </a:prstGeom>
           <a:solidFill>
@@ -8511,8 +8752,8 @@
         </p:nvSpPr>
         <p:spPr>
           <a:xfrm>
-            <a:off x="640080" y="3822192"/>
-            <a:ext cx="502920" cy="402336"/>
+            <a:off x="640080" y="3959352"/>
+            <a:ext cx="502920" cy="420624"/>
           </a:xfrm>
           <a:prstGeom prst="rect">
             <a:avLst/>
@@ -8550,8 +8791,8 @@
         </p:nvSpPr>
         <p:spPr>
           <a:xfrm>
-            <a:off x="1325880" y="3749040"/>
-            <a:ext cx="7132320" cy="292608"/>
+            <a:off x="1371600" y="3886200"/>
+            <a:ext cx="7040880" cy="292608"/>
           </a:xfrm>
           <a:prstGeom prst="rect">
             <a:avLst/>
@@ -8589,8 +8830,8 @@
         </p:nvSpPr>
         <p:spPr>
           <a:xfrm>
-            <a:off x="1325880" y="4041648"/>
-            <a:ext cx="7132320" cy="274320"/>
+            <a:off x="1371600" y="4178808"/>
+            <a:ext cx="7040880" cy="274320"/>
           </a:xfrm>
           <a:prstGeom prst="rect">
             <a:avLst/>
@@ -8628,8 +8869,8 @@
         </p:nvSpPr>
         <p:spPr>
           <a:xfrm>
-            <a:off x="0" y="4800600"/>
-            <a:ext cx="9144000" cy="342900"/>
+            <a:off x="0" y="4828032"/>
+            <a:ext cx="9144000" cy="315468"/>
           </a:xfrm>
           <a:prstGeom prst="rect">
             <a:avLst/>
@@ -8653,7 +8894,7 @@
         </p:nvSpPr>
         <p:spPr>
           <a:xfrm>
-            <a:off x="457200" y="4828032"/>
+            <a:off x="457200" y="4846320"/>
             <a:ext cx="5943600" cy="274320"/>
           </a:xfrm>
           <a:prstGeom prst="rect">
@@ -8672,7 +8913,7 @@
             <a:r>
               <a:rPr lang="en-US" sz="1100" dirty="0">
                 <a:solidFill>
-                  <a:srgbClr val="5A6F72"/>
+                  <a:srgbClr val="023C42"/>
                 </a:solidFill>
                 <a:latin typeface="Calibri" pitchFamily="34" charset="0"/>
                 <a:ea typeface="Calibri" pitchFamily="34" charset="-122"/>
@@ -8692,7 +8933,7 @@
         </p:nvSpPr>
         <p:spPr>
           <a:xfrm>
-            <a:off x="7498080" y="4828032"/>
+            <a:off x="7498080" y="4846320"/>
             <a:ext cx="1188720" cy="274320"/>
           </a:xfrm>
           <a:prstGeom prst="rect">
@@ -8711,7 +8952,7 @@
             <a:r>
               <a:rPr lang="en-US" sz="1100" dirty="0">
                 <a:solidFill>
-                  <a:srgbClr val="5A6F72"/>
+                  <a:srgbClr val="023C42"/>
                 </a:solidFill>
                 <a:latin typeface="Calibri" pitchFamily="34" charset="0"/>
                 <a:ea typeface="Calibri" pitchFamily="34" charset="-122"/>
@@ -8801,8 +9042,8 @@
         </p:nvSpPr>
         <p:spPr>
           <a:xfrm>
-            <a:off x="457200" y="256032"/>
-            <a:ext cx="8229600" cy="502920"/>
+            <a:off x="457200" y="292608"/>
+            <a:ext cx="8229600" cy="457200"/>
           </a:xfrm>
           <a:prstGeom prst="rect">
             <a:avLst/>
@@ -8818,7 +9059,7 @@
               <a:buNone/>
             </a:pPr>
             <a:r>
-              <a:rPr lang="en-US" sz="3600" b="1" dirty="0">
+              <a:rPr lang="en-US" sz="3400" b="1" dirty="0">
                 <a:solidFill>
                   <a:srgbClr val="012A30"/>
                 </a:solidFill>
@@ -8828,7 +9069,7 @@
               </a:rPr>
               <a:t>未完成项与下一步</a:t>
             </a:r>
-            <a:endParaRPr lang="en-US" sz="3600" dirty="0"/>
+            <a:endParaRPr lang="en-US" sz="3400" dirty="0"/>
           </a:p>
         </p:txBody>
       </p:sp>
@@ -8840,7 +9081,7 @@
         </p:nvSpPr>
         <p:spPr>
           <a:xfrm>
-            <a:off x="457200" y="822960"/>
+            <a:off x="457200" y="804672"/>
             <a:ext cx="8229600" cy="274320"/>
           </a:xfrm>
           <a:prstGeom prst="rect">
@@ -8859,7 +9100,7 @@
             <a:r>
               <a:rPr lang="en-US" sz="1400" i="1" dirty="0">
                 <a:solidFill>
-                  <a:srgbClr val="5A6F72"/>
+                  <a:srgbClr val="3D5558"/>
                 </a:solidFill>
                 <a:latin typeface="Calibri" pitchFamily="34" charset="0"/>
                 <a:ea typeface="Calibri" pitchFamily="34" charset="-122"/>
@@ -8880,17 +9121,22 @@
         <p:spPr>
           <a:xfrm>
             <a:off x="457200" y="1234440"/>
-            <a:ext cx="4023360" cy="3200400"/>
-          </a:xfrm>
-          <a:prstGeom prst="roundRect">
-            <a:avLst>
-              <a:gd name="adj" fmla="val 2857"/>
-            </a:avLst>
+            <a:ext cx="3977640" cy="3200400"/>
+          </a:xfrm>
+          <a:prstGeom prst="rect">
+            <a:avLst/>
           </a:prstGeom>
           <a:solidFill>
             <a:srgbClr val="FFFFFF"/>
           </a:solidFill>
           <a:ln/>
+          <a:effectLst>
+            <a:outerShdw sx="100000" sy="100000" kx="0" ky="0" algn="bl" rotWithShape="0" blurRad="101600" dist="25400" dir="8100000">
+              <a:srgbClr val="012A30">
+                <a:alpha val="8000"/>
+              </a:srgbClr>
+            </a:outerShdw>
+          </a:effectLst>
         </p:spPr>
       </p:sp>
       <p:sp>
@@ -8902,7 +9148,7 @@
         <p:spPr>
           <a:xfrm>
             <a:off x="457200" y="1234440"/>
-            <a:ext cx="4023360" cy="457200"/>
+            <a:ext cx="3977640" cy="457200"/>
           </a:xfrm>
           <a:prstGeom prst="rect">
             <a:avLst/>
@@ -8960,18 +9206,23 @@
         </p:nvSpPr>
         <p:spPr>
           <a:xfrm>
-            <a:off x="4663440" y="1234440"/>
-            <a:ext cx="4023360" cy="3200400"/>
-          </a:xfrm>
-          <a:prstGeom prst="roundRect">
-            <a:avLst>
-              <a:gd name="adj" fmla="val 2857"/>
-            </a:avLst>
+            <a:off x="4709160" y="1234440"/>
+            <a:ext cx="3977640" cy="3200400"/>
+          </a:xfrm>
+          <a:prstGeom prst="rect">
+            <a:avLst/>
           </a:prstGeom>
           <a:solidFill>
             <a:srgbClr val="FFFFFF"/>
           </a:solidFill>
           <a:ln/>
+          <a:effectLst>
+            <a:outerShdw sx="100000" sy="100000" kx="0" ky="0" algn="bl" rotWithShape="0" blurRad="101600" dist="25400" dir="8100000">
+              <a:srgbClr val="012A30">
+                <a:alpha val="8000"/>
+              </a:srgbClr>
+            </a:outerShdw>
+          </a:effectLst>
         </p:spPr>
       </p:sp>
       <p:sp>
@@ -8982,14 +9233,14 @@
         </p:nvSpPr>
         <p:spPr>
           <a:xfrm>
-            <a:off x="4663440" y="1234440"/>
-            <a:ext cx="4023360" cy="457200"/>
-          </a:xfrm>
-          <a:prstGeom prst="rect">
-            <a:avLst/>
-          </a:prstGeom>
-          <a:solidFill>
-            <a:srgbClr val="00A896"/>
+            <a:off x="4709160" y="1234440"/>
+            <a:ext cx="3977640" cy="457200"/>
+          </a:xfrm>
+          <a:prstGeom prst="rect">
+            <a:avLst/>
+          </a:prstGeom>
+          <a:solidFill>
+            <a:srgbClr val="028090"/>
           </a:solidFill>
           <a:ln/>
         </p:spPr>
@@ -9002,7 +9253,7 @@
         </p:nvSpPr>
         <p:spPr>
           <a:xfrm>
-            <a:off x="4846320" y="1280160"/>
+            <a:off x="4892040" y="1280160"/>
             <a:ext cx="3657600" cy="365760"/>
           </a:xfrm>
           <a:prstGeom prst="rect">
@@ -9531,7 +9782,7 @@
         </p:nvSpPr>
         <p:spPr>
           <a:xfrm>
-            <a:off x="4892040" y="1920240"/>
+            <a:off x="4937760" y="1920240"/>
             <a:ext cx="292608" cy="292608"/>
           </a:xfrm>
           <a:prstGeom prst="ellipse">
@@ -9551,7 +9802,7 @@
         </p:nvSpPr>
         <p:spPr>
           <a:xfrm>
-            <a:off x="4892040" y="1920240"/>
+            <a:off x="4937760" y="1920240"/>
             <a:ext cx="292608" cy="292608"/>
           </a:xfrm>
           <a:prstGeom prst="rect">
@@ -9570,7 +9821,7 @@
             <a:r>
               <a:rPr lang="en-US" sz="1200" b="1" dirty="0">
                 <a:solidFill>
-                  <a:srgbClr val="00A896"/>
+                  <a:srgbClr val="028090"/>
                 </a:solidFill>
                 <a:latin typeface="Calibri" pitchFamily="34" charset="0"/>
                 <a:ea typeface="Calibri" pitchFamily="34" charset="-122"/>
@@ -9590,7 +9841,7 @@
         </p:nvSpPr>
         <p:spPr>
           <a:xfrm>
-            <a:off x="5303520" y="1874520"/>
+            <a:off x="5349240" y="1874520"/>
             <a:ext cx="3108960" cy="365760"/>
           </a:xfrm>
           <a:prstGeom prst="rect">
@@ -9629,7 +9880,7 @@
         </p:nvSpPr>
         <p:spPr>
           <a:xfrm>
-            <a:off x="4892040" y="2377440"/>
+            <a:off x="4937760" y="2377440"/>
             <a:ext cx="292608" cy="292608"/>
           </a:xfrm>
           <a:prstGeom prst="ellipse">
@@ -9649,7 +9900,7 @@
         </p:nvSpPr>
         <p:spPr>
           <a:xfrm>
-            <a:off x="4892040" y="2377440"/>
+            <a:off x="4937760" y="2377440"/>
             <a:ext cx="292608" cy="292608"/>
           </a:xfrm>
           <a:prstGeom prst="rect">
@@ -9668,7 +9919,7 @@
             <a:r>
               <a:rPr lang="en-US" sz="1200" b="1" dirty="0">
                 <a:solidFill>
-                  <a:srgbClr val="00A896"/>
+                  <a:srgbClr val="028090"/>
                 </a:solidFill>
                 <a:latin typeface="Calibri" pitchFamily="34" charset="0"/>
                 <a:ea typeface="Calibri" pitchFamily="34" charset="-122"/>
@@ -9688,7 +9939,7 @@
         </p:nvSpPr>
         <p:spPr>
           <a:xfrm>
-            <a:off x="5303520" y="2331720"/>
+            <a:off x="5349240" y="2331720"/>
             <a:ext cx="3108960" cy="365760"/>
           </a:xfrm>
           <a:prstGeom prst="rect">
@@ -9727,7 +9978,7 @@
         </p:nvSpPr>
         <p:spPr>
           <a:xfrm>
-            <a:off x="4892040" y="2834640"/>
+            <a:off x="4937760" y="2834640"/>
             <a:ext cx="292608" cy="292608"/>
           </a:xfrm>
           <a:prstGeom prst="ellipse">
@@ -9747,7 +9998,7 @@
         </p:nvSpPr>
         <p:spPr>
           <a:xfrm>
-            <a:off x="4892040" y="2834640"/>
+            <a:off x="4937760" y="2834640"/>
             <a:ext cx="292608" cy="292608"/>
           </a:xfrm>
           <a:prstGeom prst="rect">
@@ -9766,7 +10017,7 @@
             <a:r>
               <a:rPr lang="en-US" sz="1200" b="1" dirty="0">
                 <a:solidFill>
-                  <a:srgbClr val="00A896"/>
+                  <a:srgbClr val="028090"/>
                 </a:solidFill>
                 <a:latin typeface="Calibri" pitchFamily="34" charset="0"/>
                 <a:ea typeface="Calibri" pitchFamily="34" charset="-122"/>
@@ -9786,7 +10037,7 @@
         </p:nvSpPr>
         <p:spPr>
           <a:xfrm>
-            <a:off x="5303520" y="2788920"/>
+            <a:off x="5349240" y="2788920"/>
             <a:ext cx="3108960" cy="365760"/>
           </a:xfrm>
           <a:prstGeom prst="rect">
@@ -9825,7 +10076,7 @@
         </p:nvSpPr>
         <p:spPr>
           <a:xfrm>
-            <a:off x="4892040" y="3291840"/>
+            <a:off x="4937760" y="3291840"/>
             <a:ext cx="292608" cy="292608"/>
           </a:xfrm>
           <a:prstGeom prst="ellipse">
@@ -9845,7 +10096,7 @@
         </p:nvSpPr>
         <p:spPr>
           <a:xfrm>
-            <a:off x="4892040" y="3291840"/>
+            <a:off x="4937760" y="3291840"/>
             <a:ext cx="292608" cy="292608"/>
           </a:xfrm>
           <a:prstGeom prst="rect">
@@ -9864,7 +10115,7 @@
             <a:r>
               <a:rPr lang="en-US" sz="1200" b="1" dirty="0">
                 <a:solidFill>
-                  <a:srgbClr val="00A896"/>
+                  <a:srgbClr val="028090"/>
                 </a:solidFill>
                 <a:latin typeface="Calibri" pitchFamily="34" charset="0"/>
                 <a:ea typeface="Calibri" pitchFamily="34" charset="-122"/>
@@ -9884,7 +10135,7 @@
         </p:nvSpPr>
         <p:spPr>
           <a:xfrm>
-            <a:off x="5303520" y="3246120"/>
+            <a:off x="5349240" y="3246120"/>
             <a:ext cx="3108960" cy="365760"/>
           </a:xfrm>
           <a:prstGeom prst="rect">
@@ -9923,7 +10174,7 @@
         </p:nvSpPr>
         <p:spPr>
           <a:xfrm>
-            <a:off x="4892040" y="3749040"/>
+            <a:off x="4937760" y="3749040"/>
             <a:ext cx="292608" cy="292608"/>
           </a:xfrm>
           <a:prstGeom prst="ellipse">
@@ -9943,7 +10194,7 @@
         </p:nvSpPr>
         <p:spPr>
           <a:xfrm>
-            <a:off x="4892040" y="3749040"/>
+            <a:off x="4937760" y="3749040"/>
             <a:ext cx="292608" cy="292608"/>
           </a:xfrm>
           <a:prstGeom prst="rect">
@@ -9962,7 +10213,7 @@
             <a:r>
               <a:rPr lang="en-US" sz="1200" b="1" dirty="0">
                 <a:solidFill>
-                  <a:srgbClr val="00A896"/>
+                  <a:srgbClr val="028090"/>
                 </a:solidFill>
                 <a:latin typeface="Calibri" pitchFamily="34" charset="0"/>
                 <a:ea typeface="Calibri" pitchFamily="34" charset="-122"/>
@@ -9982,7 +10233,7 @@
         </p:nvSpPr>
         <p:spPr>
           <a:xfrm>
-            <a:off x="5303520" y="3703320"/>
+            <a:off x="5349240" y="3703320"/>
             <a:ext cx="3108960" cy="365760"/>
           </a:xfrm>
           <a:prstGeom prst="rect">
@@ -10021,8 +10272,8 @@
         </p:nvSpPr>
         <p:spPr>
           <a:xfrm>
-            <a:off x="0" y="4800600"/>
-            <a:ext cx="9144000" cy="342900"/>
+            <a:off x="0" y="4828032"/>
+            <a:ext cx="9144000" cy="315468"/>
           </a:xfrm>
           <a:prstGeom prst="rect">
             <a:avLst/>
@@ -10046,7 +10297,7 @@
         </p:nvSpPr>
         <p:spPr>
           <a:xfrm>
-            <a:off x="457200" y="4828032"/>
+            <a:off x="457200" y="4846320"/>
             <a:ext cx="5943600" cy="274320"/>
           </a:xfrm>
           <a:prstGeom prst="rect">
@@ -10065,7 +10316,7 @@
             <a:r>
               <a:rPr lang="en-US" sz="1100" dirty="0">
                 <a:solidFill>
-                  <a:srgbClr val="5A6F72"/>
+                  <a:srgbClr val="023C42"/>
                 </a:solidFill>
                 <a:latin typeface="Calibri" pitchFamily="34" charset="0"/>
                 <a:ea typeface="Calibri" pitchFamily="34" charset="-122"/>
@@ -10085,7 +10336,7 @@
         </p:nvSpPr>
         <p:spPr>
           <a:xfrm>
-            <a:off x="7498080" y="4828032"/>
+            <a:off x="7498080" y="4846320"/>
             <a:ext cx="1188720" cy="274320"/>
           </a:xfrm>
           <a:prstGeom prst="rect">
@@ -10104,7 +10355,7 @@
             <a:r>
               <a:rPr lang="en-US" sz="1100" dirty="0">
                 <a:solidFill>
-                  <a:srgbClr val="5A6F72"/>
+                  <a:srgbClr val="023C42"/>
                 </a:solidFill>
                 <a:latin typeface="Calibri" pitchFamily="34" charset="0"/>
                 <a:ea typeface="Calibri" pitchFamily="34" charset="-122"/>
@@ -10194,8 +10445,8 @@
         </p:nvSpPr>
         <p:spPr>
           <a:xfrm>
-            <a:off x="457200" y="256032"/>
-            <a:ext cx="8229600" cy="502920"/>
+            <a:off x="457200" y="292608"/>
+            <a:ext cx="8229600" cy="457200"/>
           </a:xfrm>
           <a:prstGeom prst="rect">
             <a:avLst/>
@@ -10211,7 +10462,7 @@
               <a:buNone/>
             </a:pPr>
             <a:r>
-              <a:rPr lang="en-US" sz="3600" b="1" dirty="0">
+              <a:rPr lang="en-US" sz="3400" b="1" dirty="0">
                 <a:solidFill>
                   <a:srgbClr val="012A30"/>
                 </a:solidFill>
@@ -10221,7 +10472,7 @@
               </a:rPr>
               <a:t>工程与 CI 状态</a:t>
             </a:r>
-            <a:endParaRPr lang="en-US" sz="3600" dirty="0"/>
+            <a:endParaRPr lang="en-US" sz="3400" dirty="0"/>
           </a:p>
         </p:txBody>
       </p:sp>
@@ -10233,7 +10484,7 @@
         </p:nvSpPr>
         <p:spPr>
           <a:xfrm>
-            <a:off x="457200" y="822960"/>
+            <a:off x="457200" y="804672"/>
             <a:ext cx="8229600" cy="274320"/>
           </a:xfrm>
           <a:prstGeom prst="rect">
@@ -10252,7 +10503,7 @@
             <a:r>
               <a:rPr lang="en-US" sz="1400" i="1" dirty="0">
                 <a:solidFill>
-                  <a:srgbClr val="5A6F72"/>
+                  <a:srgbClr val="3D5558"/>
                 </a:solidFill>
                 <a:latin typeface="Calibri" pitchFamily="34" charset="0"/>
                 <a:ea typeface="Calibri" pitchFamily="34" charset="-122"/>
@@ -10272,12 +10523,12 @@
         </p:nvSpPr>
         <p:spPr>
           <a:xfrm>
-            <a:off x="457200" y="1280160"/>
-            <a:ext cx="4069080" cy="1371600"/>
+            <a:off x="457200" y="1234440"/>
+            <a:ext cx="4114800" cy="1417320"/>
           </a:xfrm>
           <a:prstGeom prst="roundRect">
             <a:avLst>
-              <a:gd name="adj" fmla="val 6667"/>
+              <a:gd name="adj" fmla="val 6452"/>
             </a:avLst>
           </a:prstGeom>
           <a:solidFill>
@@ -10302,7 +10553,7 @@
         <p:spPr>
           <a:xfrm>
             <a:off x="685800" y="1691640"/>
-            <a:ext cx="502920" cy="502920"/>
+            <a:ext cx="457200" cy="457200"/>
           </a:xfrm>
           <a:prstGeom prst="ellipse">
             <a:avLst/>
@@ -10329,8 +10580,8 @@
         </p:blipFill>
         <p:spPr>
           <a:xfrm>
-            <a:off x="777240" y="1783080"/>
-            <a:ext cx="320040" cy="320040"/>
+            <a:off x="758952" y="1764792"/>
+            <a:ext cx="310896" cy="310896"/>
           </a:xfrm>
           <a:prstGeom prst="rect">
             <a:avLst/>
@@ -10345,8 +10596,8 @@
         </p:nvSpPr>
         <p:spPr>
           <a:xfrm>
-            <a:off x="1371600" y="1508760"/>
-            <a:ext cx="2926080" cy="365760"/>
+            <a:off x="1325880" y="1463040"/>
+            <a:ext cx="3017520" cy="365760"/>
           </a:xfrm>
           <a:prstGeom prst="rect">
             <a:avLst/>
@@ -10384,8 +10635,8 @@
         </p:nvSpPr>
         <p:spPr>
           <a:xfrm>
-            <a:off x="1371600" y="1920240"/>
-            <a:ext cx="2926080" cy="548640"/>
+            <a:off x="1325880" y="1874520"/>
+            <a:ext cx="3017520" cy="594360"/>
           </a:xfrm>
           <a:prstGeom prst="rect">
             <a:avLst/>
@@ -10423,12 +10674,12 @@
         </p:nvSpPr>
         <p:spPr>
           <a:xfrm>
-            <a:off x="4754880" y="1280160"/>
-            <a:ext cx="4069080" cy="1371600"/>
+            <a:off x="4800600" y="1234440"/>
+            <a:ext cx="4114800" cy="1417320"/>
           </a:xfrm>
           <a:prstGeom prst="roundRect">
             <a:avLst>
-              <a:gd name="adj" fmla="val 6667"/>
+              <a:gd name="adj" fmla="val 6452"/>
             </a:avLst>
           </a:prstGeom>
           <a:solidFill>
@@ -10452,8 +10703,8 @@
         </p:nvSpPr>
         <p:spPr>
           <a:xfrm>
-            <a:off x="4983480" y="1691640"/>
-            <a:ext cx="502920" cy="502920"/>
+            <a:off x="5029200" y="1691640"/>
+            <a:ext cx="457200" cy="457200"/>
           </a:xfrm>
           <a:prstGeom prst="ellipse">
             <a:avLst/>
@@ -10480,8 +10731,8 @@
         </p:blipFill>
         <p:spPr>
           <a:xfrm>
-            <a:off x="5074920" y="1783080"/>
-            <a:ext cx="320040" cy="320040"/>
+            <a:off x="5102352" y="1764792"/>
+            <a:ext cx="310896" cy="310896"/>
           </a:xfrm>
           <a:prstGeom prst="rect">
             <a:avLst/>
@@ -10496,8 +10747,8 @@
         </p:nvSpPr>
         <p:spPr>
           <a:xfrm>
-            <a:off x="5669280" y="1508760"/>
-            <a:ext cx="2926080" cy="365760"/>
+            <a:off x="5669280" y="1463040"/>
+            <a:ext cx="3017520" cy="365760"/>
           </a:xfrm>
           <a:prstGeom prst="rect">
             <a:avLst/>
@@ -10535,8 +10786,8 @@
         </p:nvSpPr>
         <p:spPr>
           <a:xfrm>
-            <a:off x="5669280" y="1920240"/>
-            <a:ext cx="2926080" cy="548640"/>
+            <a:off x="5669280" y="1874520"/>
+            <a:ext cx="3017520" cy="594360"/>
           </a:xfrm>
           <a:prstGeom prst="rect">
             <a:avLst/>
@@ -10575,11 +10826,11 @@
         <p:spPr>
           <a:xfrm>
             <a:off x="457200" y="2834640"/>
-            <a:ext cx="4069080" cy="1371600"/>
+            <a:ext cx="4114800" cy="1417320"/>
           </a:xfrm>
           <a:prstGeom prst="roundRect">
             <a:avLst>
-              <a:gd name="adj" fmla="val 6667"/>
+              <a:gd name="adj" fmla="val 6452"/>
             </a:avLst>
           </a:prstGeom>
           <a:solidFill>
@@ -10603,8 +10854,8 @@
         </p:nvSpPr>
         <p:spPr>
           <a:xfrm>
-            <a:off x="685800" y="3246120"/>
-            <a:ext cx="502920" cy="502920"/>
+            <a:off x="685800" y="3291840"/>
+            <a:ext cx="457200" cy="457200"/>
           </a:xfrm>
           <a:prstGeom prst="ellipse">
             <a:avLst/>
@@ -10631,8 +10882,8 @@
         </p:blipFill>
         <p:spPr>
           <a:xfrm>
-            <a:off x="777240" y="3337560"/>
-            <a:ext cx="320040" cy="320040"/>
+            <a:off x="758952" y="3364992"/>
+            <a:ext cx="310896" cy="310896"/>
           </a:xfrm>
           <a:prstGeom prst="rect">
             <a:avLst/>
@@ -10647,8 +10898,8 @@
         </p:nvSpPr>
         <p:spPr>
           <a:xfrm>
-            <a:off x="1371600" y="3063240"/>
-            <a:ext cx="2926080" cy="365760"/>
+            <a:off x="1325880" y="3063240"/>
+            <a:ext cx="3017520" cy="365760"/>
           </a:xfrm>
           <a:prstGeom prst="rect">
             <a:avLst/>
@@ -10686,8 +10937,8 @@
         </p:nvSpPr>
         <p:spPr>
           <a:xfrm>
-            <a:off x="1371600" y="3474720"/>
-            <a:ext cx="2926080" cy="548640"/>
+            <a:off x="1325880" y="3474720"/>
+            <a:ext cx="3017520" cy="594360"/>
           </a:xfrm>
           <a:prstGeom prst="rect">
             <a:avLst/>
@@ -10711,7 +10962,7 @@
                 <a:ea typeface="Calibri" pitchFamily="34" charset="-122"/>
                 <a:cs typeface="Calibri" pitchFamily="34" charset="-120"/>
               </a:rPr>
-              <a:t>开放 PR：#66（You.com）、#72（昨日日报 Draft）；Issues：#5、#65</a:t>
+              <a:t>开放 PR：#66（You.com）、#72（昨日日报）；Issues：#5、#65</a:t>
             </a:r>
             <a:endParaRPr lang="en-US" sz="1300" dirty="0"/>
           </a:p>
@@ -10725,12 +10976,12 @@
         </p:nvSpPr>
         <p:spPr>
           <a:xfrm>
-            <a:off x="4754880" y="2834640"/>
-            <a:ext cx="4069080" cy="1371600"/>
+            <a:off x="4800600" y="2834640"/>
+            <a:ext cx="4114800" cy="1417320"/>
           </a:xfrm>
           <a:prstGeom prst="roundRect">
             <a:avLst>
-              <a:gd name="adj" fmla="val 6667"/>
+              <a:gd name="adj" fmla="val 6452"/>
             </a:avLst>
           </a:prstGeom>
           <a:solidFill>
@@ -10754,8 +11005,8 @@
         </p:nvSpPr>
         <p:spPr>
           <a:xfrm>
-            <a:off x="4983480" y="3246120"/>
-            <a:ext cx="502920" cy="502920"/>
+            <a:off x="5029200" y="3291840"/>
+            <a:ext cx="457200" cy="457200"/>
           </a:xfrm>
           <a:prstGeom prst="ellipse">
             <a:avLst/>
@@ -10782,8 +11033,8 @@
         </p:blipFill>
         <p:spPr>
           <a:xfrm>
-            <a:off x="5074920" y="3337560"/>
-            <a:ext cx="320040" cy="320040"/>
+            <a:off x="5102352" y="3364992"/>
+            <a:ext cx="310896" cy="310896"/>
           </a:xfrm>
           <a:prstGeom prst="rect">
             <a:avLst/>
@@ -10799,7 +11050,7 @@
         <p:spPr>
           <a:xfrm>
             <a:off x="5669280" y="3063240"/>
-            <a:ext cx="2926080" cy="365760"/>
+            <a:ext cx="3017520" cy="365760"/>
           </a:xfrm>
           <a:prstGeom prst="rect">
             <a:avLst/>
@@ -10838,7 +11089,7 @@
         <p:spPr>
           <a:xfrm>
             <a:off x="5669280" y="3474720"/>
-            <a:ext cx="2926080" cy="548640"/>
+            <a:ext cx="3017520" cy="594360"/>
           </a:xfrm>
           <a:prstGeom prst="rect">
             <a:avLst/>
@@ -10876,8 +11127,8 @@
         </p:nvSpPr>
         <p:spPr>
           <a:xfrm>
-            <a:off x="0" y="4800600"/>
-            <a:ext cx="9144000" cy="342900"/>
+            <a:off x="0" y="4828032"/>
+            <a:ext cx="9144000" cy="315468"/>
           </a:xfrm>
           <a:prstGeom prst="rect">
             <a:avLst/>
@@ -10901,7 +11152,7 @@
         </p:nvSpPr>
         <p:spPr>
           <a:xfrm>
-            <a:off x="457200" y="4828032"/>
+            <a:off x="457200" y="4846320"/>
             <a:ext cx="5943600" cy="274320"/>
           </a:xfrm>
           <a:prstGeom prst="rect">
@@ -10920,7 +11171,7 @@
             <a:r>
               <a:rPr lang="en-US" sz="1100" dirty="0">
                 <a:solidFill>
-                  <a:srgbClr val="5A6F72"/>
+                  <a:srgbClr val="023C42"/>
                 </a:solidFill>
                 <a:latin typeface="Calibri" pitchFamily="34" charset="0"/>
                 <a:ea typeface="Calibri" pitchFamily="34" charset="-122"/>
@@ -10940,7 +11191,7 @@
         </p:nvSpPr>
         <p:spPr>
           <a:xfrm>
-            <a:off x="7498080" y="4828032"/>
+            <a:off x="7498080" y="4846320"/>
             <a:ext cx="1188720" cy="274320"/>
           </a:xfrm>
           <a:prstGeom prst="rect">
@@ -10959,7 +11210,7 @@
             <a:r>
               <a:rPr lang="en-US" sz="1100" dirty="0">
                 <a:solidFill>
-                  <a:srgbClr val="5A6F72"/>
+                  <a:srgbClr val="023C42"/>
                 </a:solidFill>
                 <a:latin typeface="Calibri" pitchFamily="34" charset="0"/>
                 <a:ea typeface="Calibri" pitchFamily="34" charset="-122"/>
